--- a/第1章-空间数据简介/第1节-空间数据基本概念-2学时.pptx
+++ b/第1章-空间数据简介/第1节-空间数据基本概念-2学时.pptx
@@ -6,43 +6,44 @@
     <p:sldMasterId id="2147484986" r:id="rId2"/>
   </p:sldMasterIdLst>
   <p:notesMasterIdLst>
-    <p:notesMasterId r:id="rId29"/>
+    <p:notesMasterId r:id="rId30"/>
   </p:notesMasterIdLst>
   <p:handoutMasterIdLst>
-    <p:handoutMasterId r:id="rId30"/>
+    <p:handoutMasterId r:id="rId31"/>
   </p:handoutMasterIdLst>
   <p:sldIdLst>
     <p:sldId id="2206" r:id="rId3"/>
     <p:sldId id="2722" r:id="rId4"/>
     <p:sldId id="2727" r:id="rId5"/>
-    <p:sldId id="2777" r:id="rId6"/>
-    <p:sldId id="2728" r:id="rId7"/>
-    <p:sldId id="2778" r:id="rId8"/>
-    <p:sldId id="2779" r:id="rId9"/>
-    <p:sldId id="2780" r:id="rId10"/>
-    <p:sldId id="2708" r:id="rId11"/>
-    <p:sldId id="2387" r:id="rId12"/>
-    <p:sldId id="2447" r:id="rId13"/>
-    <p:sldId id="2762" r:id="rId14"/>
-    <p:sldId id="2716" r:id="rId15"/>
-    <p:sldId id="2781" r:id="rId16"/>
-    <p:sldId id="2782" r:id="rId17"/>
-    <p:sldId id="2709" r:id="rId18"/>
-    <p:sldId id="2764" r:id="rId19"/>
-    <p:sldId id="2757" r:id="rId20"/>
-    <p:sldId id="2768" r:id="rId21"/>
-    <p:sldId id="2767" r:id="rId22"/>
-    <p:sldId id="2747" r:id="rId23"/>
-    <p:sldId id="2775" r:id="rId24"/>
-    <p:sldId id="2771" r:id="rId25"/>
-    <p:sldId id="2783" r:id="rId26"/>
-    <p:sldId id="2784" r:id="rId27"/>
-    <p:sldId id="2765" r:id="rId28"/>
+    <p:sldId id="2785" r:id="rId6"/>
+    <p:sldId id="2777" r:id="rId7"/>
+    <p:sldId id="2728" r:id="rId8"/>
+    <p:sldId id="2778" r:id="rId9"/>
+    <p:sldId id="2779" r:id="rId10"/>
+    <p:sldId id="2780" r:id="rId11"/>
+    <p:sldId id="2708" r:id="rId12"/>
+    <p:sldId id="2387" r:id="rId13"/>
+    <p:sldId id="2447" r:id="rId14"/>
+    <p:sldId id="2762" r:id="rId15"/>
+    <p:sldId id="2716" r:id="rId16"/>
+    <p:sldId id="2781" r:id="rId17"/>
+    <p:sldId id="2782" r:id="rId18"/>
+    <p:sldId id="2709" r:id="rId19"/>
+    <p:sldId id="2764" r:id="rId20"/>
+    <p:sldId id="2757" r:id="rId21"/>
+    <p:sldId id="2768" r:id="rId22"/>
+    <p:sldId id="2767" r:id="rId23"/>
+    <p:sldId id="2747" r:id="rId24"/>
+    <p:sldId id="2775" r:id="rId25"/>
+    <p:sldId id="2771" r:id="rId26"/>
+    <p:sldId id="2783" r:id="rId27"/>
+    <p:sldId id="2784" r:id="rId28"/>
+    <p:sldId id="2765" r:id="rId29"/>
   </p:sldIdLst>
   <p:sldSz cx="12192000" cy="6858000"/>
   <p:notesSz cx="7099300" cy="10234613"/>
   <p:custDataLst>
-    <p:tags r:id="rId31"/>
+    <p:tags r:id="rId32"/>
   </p:custDataLst>
   <p:defaultTextStyle>
     <a:defPPr>
@@ -1661,30 +1662,6 @@
     </pc:docChg>
   </pc:docChgLst>
   <pc:docChgLst>
-    <pc:chgData name="Xin Luo" userId="82312ee5779919a4" providerId="LiveId" clId="{DA3CAFA3-5513-6141-A5FE-EEEF42866040}"/>
-    <pc:docChg chg="modSld">
-      <pc:chgData name="Xin Luo" userId="82312ee5779919a4" providerId="LiveId" clId="{DA3CAFA3-5513-6141-A5FE-EEEF42866040}" dt="2025-02-25T01:22:35.983" v="43" actId="1035"/>
-      <pc:docMkLst>
-        <pc:docMk/>
-      </pc:docMkLst>
-      <pc:sldChg chg="modSp mod">
-        <pc:chgData name="Xin Luo" userId="82312ee5779919a4" providerId="LiveId" clId="{DA3CAFA3-5513-6141-A5FE-EEEF42866040}" dt="2025-02-25T01:22:35.983" v="43" actId="1035"/>
-        <pc:sldMkLst>
-          <pc:docMk/>
-          <pc:sldMk cId="1602808061" sldId="2707"/>
-        </pc:sldMkLst>
-        <pc:spChg chg="mod">
-          <ac:chgData name="Xin Luo" userId="82312ee5779919a4" providerId="LiveId" clId="{DA3CAFA3-5513-6141-A5FE-EEEF42866040}" dt="2025-02-25T01:22:35.983" v="43" actId="1035"/>
-          <ac:spMkLst>
-            <pc:docMk/>
-            <pc:sldMk cId="1602808061" sldId="2707"/>
-            <ac:spMk id="2" creationId="{631AADB6-C88A-D817-4683-FC087E4E240F}"/>
-          </ac:spMkLst>
-        </pc:spChg>
-      </pc:sldChg>
-    </pc:docChg>
-  </pc:docChgLst>
-  <pc:docChgLst>
     <pc:chgData name="Xin Luo" userId="82312ee5779919a4" providerId="LiveId" clId="{4DB6C473-8E57-A543-81F7-48BE109E8C13}"/>
     <pc:docChg chg="undo custSel addSld delSld modSld sldOrd delMainMaster">
       <pc:chgData name="Xin Luo" userId="82312ee5779919a4" providerId="LiveId" clId="{4DB6C473-8E57-A543-81F7-48BE109E8C13}" dt="2023-02-21T15:10:04.498" v="5724" actId="108"/>
@@ -2030,6 +2007,30 @@
           </pc:sldLayoutMkLst>
         </pc:sldLayoutChg>
       </pc:sldMasterChg>
+    </pc:docChg>
+  </pc:docChgLst>
+  <pc:docChgLst>
+    <pc:chgData name="Xin Luo" userId="82312ee5779919a4" providerId="LiveId" clId="{DA3CAFA3-5513-6141-A5FE-EEEF42866040}"/>
+    <pc:docChg chg="modSld">
+      <pc:chgData name="Xin Luo" userId="82312ee5779919a4" providerId="LiveId" clId="{DA3CAFA3-5513-6141-A5FE-EEEF42866040}" dt="2025-02-25T01:22:35.983" v="43" actId="1035"/>
+      <pc:docMkLst>
+        <pc:docMk/>
+      </pc:docMkLst>
+      <pc:sldChg chg="modSp mod">
+        <pc:chgData name="Xin Luo" userId="82312ee5779919a4" providerId="LiveId" clId="{DA3CAFA3-5513-6141-A5FE-EEEF42866040}" dt="2025-02-25T01:22:35.983" v="43" actId="1035"/>
+        <pc:sldMkLst>
+          <pc:docMk/>
+          <pc:sldMk cId="1602808061" sldId="2707"/>
+        </pc:sldMkLst>
+        <pc:spChg chg="mod">
+          <ac:chgData name="Xin Luo" userId="82312ee5779919a4" providerId="LiveId" clId="{DA3CAFA3-5513-6141-A5FE-EEEF42866040}" dt="2025-02-25T01:22:35.983" v="43" actId="1035"/>
+          <ac:spMkLst>
+            <pc:docMk/>
+            <pc:sldMk cId="1602808061" sldId="2707"/>
+            <ac:spMk id="2" creationId="{631AADB6-C88A-D817-4683-FC087E4E240F}"/>
+          </ac:spMkLst>
+        </pc:spChg>
+      </pc:sldChg>
     </pc:docChg>
   </pc:docChgLst>
   <pc:docChgLst>
@@ -3064,7 +3065,7 @@
               </a14:hiddenFill>
             </a:ext>
             <a:ext uri="{FAA26D3D-D897-4be2-8F04-BA451C77F1D7}">
-              <ma14:placeholderFlag xmlns:ma14="http://schemas.microsoft.com/office/mac/drawingml/2011/main" xmlns="" val="1"/>
+              <ma14:placeholderFlag xmlns="" xmlns:ma14="http://schemas.microsoft.com/office/mac/drawingml/2011/main" val="1"/>
             </a:ext>
           </a:extLst>
         </p:spPr>
@@ -3452,7 +3453,7 @@
               </a14:hiddenLine>
             </a:ext>
             <a:ext uri="{FAA26D3D-D897-4be2-8F04-BA451C77F1D7}">
-              <ma14:placeholderFlag xmlns:ma14="http://schemas.microsoft.com/office/mac/drawingml/2011/main" xmlns="" val="1"/>
+              <ma14:placeholderFlag xmlns="" xmlns:ma14="http://schemas.microsoft.com/office/mac/drawingml/2011/main" val="1"/>
             </a:ext>
           </a:extLst>
         </p:spPr>
@@ -3503,6 +3504,123 @@
 </file>
 
 <file path=ppt/notesSlides/notesSlide10.xml><?xml version="1.0" encoding="utf-8"?>
+<p:notes xmlns:a="http://schemas.openxmlformats.org/drawingml/2006/main" xmlns:r="http://schemas.openxmlformats.org/officeDocument/2006/relationships" xmlns:p="http://schemas.openxmlformats.org/presentationml/2006/main">
+  <p:cSld>
+    <p:spTree>
+      <p:nvGrpSpPr>
+        <p:cNvPr id="1" name=""/>
+        <p:cNvGrpSpPr/>
+        <p:nvPr/>
+      </p:nvGrpSpPr>
+      <p:grpSpPr>
+        <a:xfrm>
+          <a:off x="0" y="0"/>
+          <a:ext cx="0" cy="0"/>
+          <a:chOff x="0" y="0"/>
+          <a:chExt cx="0" cy="0"/>
+        </a:xfrm>
+      </p:grpSpPr>
+      <p:sp>
+        <p:nvSpPr>
+          <p:cNvPr id="8193" name="Rectangle 2"/>
+          <p:cNvSpPr>
+            <a:spLocks noGrp="1" noRot="1" noChangeAspect="1" noChangeArrowheads="1" noTextEdit="1"/>
+          </p:cNvSpPr>
+          <p:nvPr>
+            <p:ph type="sldImg"/>
+          </p:nvPr>
+        </p:nvSpPr>
+        <p:spPr>
+          <a:xfrm>
+            <a:off x="142875" y="768350"/>
+            <a:ext cx="6818313" cy="3836988"/>
+          </a:xfrm>
+          <a:ln/>
+        </p:spPr>
+      </p:sp>
+      <p:sp>
+        <p:nvSpPr>
+          <p:cNvPr id="8194" name="Rectangle 3"/>
+          <p:cNvSpPr>
+            <a:spLocks noGrp="1" noChangeArrowheads="1"/>
+          </p:cNvSpPr>
+          <p:nvPr>
+            <p:ph type="body" idx="1"/>
+          </p:nvPr>
+        </p:nvSpPr>
+        <p:spPr>
+          <a:noFill/>
+          <a:ln/>
+          <a:extLst>
+            <a:ext uri="{909E8E84-426E-40DD-AFC4-6F175D3DCCD1}">
+              <a14:hiddenFill xmlns:a14="http://schemas.microsoft.com/office/drawing/2010/main">
+                <a:solidFill>
+                  <a:srgbClr val="FFFFFF"/>
+                </a:solidFill>
+              </a14:hiddenFill>
+            </a:ext>
+            <a:ext uri="{91240B29-F687-4F45-9708-019B960494DF}">
+              <a14:hiddenLine xmlns:a14="http://schemas.microsoft.com/office/drawing/2010/main" w="9525">
+                <a:solidFill>
+                  <a:srgbClr val="000000"/>
+                </a:solidFill>
+                <a:miter lim="800000"/>
+                <a:headEnd/>
+                <a:tailEnd/>
+              </a14:hiddenLine>
+            </a:ext>
+            <a:ext uri="{FAA26D3D-D897-4be2-8F04-BA451C77F1D7}">
+              <ma14:placeholderFlag xmlns="" xmlns:ma14="http://schemas.microsoft.com/office/mac/drawingml/2011/main" val="1"/>
+            </a:ext>
+          </a:extLst>
+        </p:spPr>
+        <p:txBody>
+          <a:bodyPr/>
+          <a:lstStyle/>
+          <a:p>
+            <a:pPr marL="0" marR="0" indent="0" algn="l" defTabSz="914400" rtl="0" eaLnBrk="0" fontAlgn="base" latinLnBrk="0" hangingPunct="0">
+              <a:lnSpc>
+                <a:spcPct val="100000"/>
+              </a:lnSpc>
+              <a:spcBef>
+                <a:spcPct val="30000"/>
+              </a:spcBef>
+              <a:spcAft>
+                <a:spcPct val="0"/>
+              </a:spcAft>
+              <a:buClrTx/>
+              <a:buSzTx/>
+              <a:buFontTx/>
+              <a:buNone/>
+              <a:tabLst/>
+              <a:defRPr/>
+            </a:pPr>
+            <a:endParaRPr kumimoji="1" lang="zh-CN" altLang="zh-CN" sz="1200" kern="1200">
+              <a:solidFill>
+                <a:schemeClr val="tx1"/>
+              </a:solidFill>
+              <a:effectLst/>
+              <a:latin typeface="Arial" charset="0"/>
+              <a:ea typeface="宋体" pitchFamily="2" charset="-122"/>
+              <a:cs typeface="宋体" charset="0"/>
+            </a:endParaRPr>
+          </a:p>
+        </p:txBody>
+      </p:sp>
+    </p:spTree>
+    <p:extLst>
+      <p:ext uri="{BB962C8B-B14F-4D97-AF65-F5344CB8AC3E}">
+        <p14:creationId xmlns:p14="http://schemas.microsoft.com/office/powerpoint/2010/main" val="4128186715"/>
+      </p:ext>
+    </p:extLst>
+  </p:cSld>
+  <p:clrMapOvr>
+    <a:masterClrMapping/>
+  </p:clrMapOvr>
+</p:notes>
+</file>
+
+<file path=ppt/notesSlides/notesSlide11.xml><?xml version="1.0" encoding="utf-8"?>
 <p:notes xmlns:a="http://schemas.openxmlformats.org/drawingml/2006/main" xmlns:r="http://schemas.openxmlformats.org/officeDocument/2006/relationships" xmlns:p="http://schemas.openxmlformats.org/presentationml/2006/main">
   <p:cSld>
     <p:spTree>
@@ -3577,7 +3695,7 @@
                 </a:solidFill>
               </a:rPr>
               <a:pPr/>
-              <a:t>10</a:t>
+              <a:t>11</a:t>
             </a:fld>
             <a:endParaRPr lang="zh-CN" altLang="en-US">
               <a:solidFill>
@@ -3600,7 +3718,7 @@
 </p:notes>
 </file>
 
-<file path=ppt/notesSlides/notesSlide11.xml><?xml version="1.0" encoding="utf-8"?>
+<file path=ppt/notesSlides/notesSlide12.xml><?xml version="1.0" encoding="utf-8"?>
 <p:notes xmlns:a="http://schemas.openxmlformats.org/drawingml/2006/main" xmlns:r="http://schemas.openxmlformats.org/officeDocument/2006/relationships" xmlns:p="http://schemas.openxmlformats.org/presentationml/2006/main">
   <p:cSld>
     <p:spTree>
@@ -3666,7 +3784,7 @@
 </p:notes>
 </file>
 
-<file path=ppt/notesSlides/notesSlide12.xml><?xml version="1.0" encoding="utf-8"?>
+<file path=ppt/notesSlides/notesSlide13.xml><?xml version="1.0" encoding="utf-8"?>
 <p:notes xmlns:a="http://schemas.openxmlformats.org/drawingml/2006/main" xmlns:r="http://schemas.openxmlformats.org/officeDocument/2006/relationships" xmlns:p="http://schemas.openxmlformats.org/presentationml/2006/main">
   <p:cSld>
     <p:spTree>
@@ -3732,7 +3850,7 @@
 </p:notes>
 </file>
 
-<file path=ppt/notesSlides/notesSlide13.xml><?xml version="1.0" encoding="utf-8"?>
+<file path=ppt/notesSlides/notesSlide14.xml><?xml version="1.0" encoding="utf-8"?>
 <p:notes xmlns:a="http://schemas.openxmlformats.org/drawingml/2006/main" xmlns:r="http://schemas.openxmlformats.org/officeDocument/2006/relationships" xmlns:p="http://schemas.openxmlformats.org/presentationml/2006/main">
   <p:cSld>
     <p:spTree>
@@ -3798,7 +3916,7 @@
 </p:notes>
 </file>
 
-<file path=ppt/notesSlides/notesSlide14.xml><?xml version="1.0" encoding="utf-8"?>
+<file path=ppt/notesSlides/notesSlide15.xml><?xml version="1.0" encoding="utf-8"?>
 <p:notes xmlns:a="http://schemas.openxmlformats.org/drawingml/2006/main" xmlns:r="http://schemas.openxmlformats.org/officeDocument/2006/relationships" xmlns:p="http://schemas.openxmlformats.org/presentationml/2006/main">
   <p:cSld>
     <p:spTree>
@@ -3882,7 +4000,7 @@
 </p:notes>
 </file>
 
-<file path=ppt/notesSlides/notesSlide15.xml><?xml version="1.0" encoding="utf-8"?>
+<file path=ppt/notesSlides/notesSlide16.xml><?xml version="1.0" encoding="utf-8"?>
 <p:notes xmlns:a="http://schemas.openxmlformats.org/drawingml/2006/main" xmlns:r="http://schemas.openxmlformats.org/officeDocument/2006/relationships" xmlns:p="http://schemas.openxmlformats.org/presentationml/2006/main">
   <p:cSld>
     <p:spTree>
@@ -3966,7 +4084,7 @@
 </p:notes>
 </file>
 
-<file path=ppt/notesSlides/notesSlide16.xml><?xml version="1.0" encoding="utf-8"?>
+<file path=ppt/notesSlides/notesSlide17.xml><?xml version="1.0" encoding="utf-8"?>
 <p:notes xmlns:a="http://schemas.openxmlformats.org/drawingml/2006/main" xmlns:r="http://schemas.openxmlformats.org/officeDocument/2006/relationships" xmlns:p="http://schemas.openxmlformats.org/presentationml/2006/main">
   <p:cSld>
     <p:spTree>
@@ -4032,75 +4150,6 @@
 </p:notes>
 </file>
 
-<file path=ppt/notesSlides/notesSlide17.xml><?xml version="1.0" encoding="utf-8"?>
-<p:notes xmlns:a="http://schemas.openxmlformats.org/drawingml/2006/main" xmlns:r="http://schemas.openxmlformats.org/officeDocument/2006/relationships" xmlns:p="http://schemas.openxmlformats.org/presentationml/2006/main">
-  <p:cSld>
-    <p:spTree>
-      <p:nvGrpSpPr>
-        <p:cNvPr id="1" name=""/>
-        <p:cNvGrpSpPr/>
-        <p:nvPr/>
-      </p:nvGrpSpPr>
-      <p:grpSpPr>
-        <a:xfrm>
-          <a:off x="0" y="0"/>
-          <a:ext cx="0" cy="0"/>
-          <a:chOff x="0" y="0"/>
-          <a:chExt cx="0" cy="0"/>
-        </a:xfrm>
-      </p:grpSpPr>
-      <p:sp>
-        <p:nvSpPr>
-          <p:cNvPr id="2" name="幻灯片图像占位符 1"/>
-          <p:cNvSpPr>
-            <a:spLocks noGrp="1" noRot="1" noChangeAspect="1"/>
-          </p:cNvSpPr>
-          <p:nvPr>
-            <p:ph type="sldImg"/>
-          </p:nvPr>
-        </p:nvSpPr>
-        <p:spPr>
-          <a:xfrm>
-            <a:off x="142875" y="768350"/>
-            <a:ext cx="6818313" cy="3836988"/>
-          </a:xfrm>
-        </p:spPr>
-      </p:sp>
-      <p:sp>
-        <p:nvSpPr>
-          <p:cNvPr id="3" name="备注占位符 2"/>
-          <p:cNvSpPr>
-            <a:spLocks noGrp="1"/>
-          </p:cNvSpPr>
-          <p:nvPr>
-            <p:ph type="body" idx="1"/>
-          </p:nvPr>
-        </p:nvSpPr>
-        <p:spPr/>
-        <p:txBody>
-          <a:bodyPr/>
-          <a:lstStyle/>
-          <a:p>
-            <a:r>
-              <a:rPr lang="zh-CN" altLang="en-US" dirty="0"/>
-              <a:t>具体内容见第二节</a:t>
-            </a:r>
-          </a:p>
-        </p:txBody>
-      </p:sp>
-    </p:spTree>
-    <p:extLst>
-      <p:ext uri="{BB962C8B-B14F-4D97-AF65-F5344CB8AC3E}">
-        <p14:creationId xmlns:p14="http://schemas.microsoft.com/office/powerpoint/2010/main" val="162766420"/>
-      </p:ext>
-    </p:extLst>
-  </p:cSld>
-  <p:clrMapOvr>
-    <a:masterClrMapping/>
-  </p:clrMapOvr>
-</p:notes>
-</file>
-
 <file path=ppt/notesSlides/notesSlide18.xml><?xml version="1.0" encoding="utf-8"?>
 <p:notes xmlns:a="http://schemas.openxmlformats.org/drawingml/2006/main" xmlns:r="http://schemas.openxmlformats.org/officeDocument/2006/relationships" xmlns:p="http://schemas.openxmlformats.org/presentationml/2006/main">
   <p:cSld>
@@ -4152,23 +4201,15 @@
           <a:p>
             <a:r>
               <a:rPr lang="zh-CN" altLang="en-US" dirty="0"/>
-              <a:t>矢量数据：点的有序集合，一个点构成点要素，多个点构成线要素，多个点且首尾闭合构成面要素。</a:t>
-            </a:r>
-            <a:endParaRPr lang="en-US" altLang="zh-CN" dirty="0"/>
-          </a:p>
-          <a:p>
-            <a:r>
-              <a:rPr lang="zh-CN" altLang="en-US" dirty="0"/>
-              <a:t>矢量数据表示不同要素相互关系，如距离，位置。属性数据相互关系，如面要素面积大小、线要素长短关系。</a:t>
-            </a:r>
-            <a:endParaRPr lang="en-US" altLang="zh-CN" dirty="0"/>
+              <a:t>具体内容见第二节</a:t>
+            </a:r>
           </a:p>
         </p:txBody>
       </p:sp>
     </p:spTree>
     <p:extLst>
       <p:ext uri="{BB962C8B-B14F-4D97-AF65-F5344CB8AC3E}">
-        <p14:creationId xmlns:p14="http://schemas.microsoft.com/office/powerpoint/2010/main" val="2430468701"/>
+        <p14:creationId xmlns:p14="http://schemas.microsoft.com/office/powerpoint/2010/main" val="162766420"/>
       </p:ext>
     </p:extLst>
   </p:cSld>
@@ -4229,34 +4270,23 @@
           <a:p>
             <a:r>
               <a:rPr lang="zh-CN" altLang="en-US" dirty="0"/>
-              <a:t>矢量数据复合类型：多点，多线，多面。</a:t>
-            </a:r>
-            <a:r>
-              <a:rPr lang="en-US" altLang="zh-CN" dirty="0" err="1"/>
-              <a:t>qgis</a:t>
-            </a:r>
-            <a:r>
-              <a:rPr lang="zh-CN" altLang="en-US" dirty="0"/>
-              <a:t>新建矢量要素演示。</a:t>
+              <a:t>矢量数据：点的有序集合，一个点构成点要素，多个点构成线要素，多个点且首尾闭合构成面要素。</a:t>
             </a:r>
             <a:endParaRPr lang="en-US" altLang="zh-CN" dirty="0"/>
           </a:p>
           <a:p>
             <a:r>
               <a:rPr lang="zh-CN" altLang="en-US" dirty="0"/>
-              <a:t>矢量几何和属性：结合全国行政地图说明</a:t>
+              <a:t>矢量数据表示不同要素相互关系，如距离，位置。属性数据相互关系，如面要素面积大小、线要素长短关系。</a:t>
             </a:r>
             <a:endParaRPr lang="en-US" altLang="zh-CN" dirty="0"/>
-          </a:p>
-          <a:p>
-            <a:endParaRPr lang="zh-CN" altLang="en-US" dirty="0"/>
           </a:p>
         </p:txBody>
       </p:sp>
     </p:spTree>
     <p:extLst>
       <p:ext uri="{BB962C8B-B14F-4D97-AF65-F5344CB8AC3E}">
-        <p14:creationId xmlns:p14="http://schemas.microsoft.com/office/powerpoint/2010/main" val="3493576218"/>
+        <p14:creationId xmlns:p14="http://schemas.microsoft.com/office/powerpoint/2010/main" val="2430468701"/>
       </p:ext>
     </p:extLst>
   </p:cSld>
@@ -4464,6 +4494,94 @@
           <a:p>
             <a:r>
               <a:rPr lang="zh-CN" altLang="en-US" dirty="0"/>
+              <a:t>矢量数据复合类型：多点，多线，多面。</a:t>
+            </a:r>
+            <a:r>
+              <a:rPr lang="en-US" altLang="zh-CN" dirty="0" err="1"/>
+              <a:t>qgis</a:t>
+            </a:r>
+            <a:r>
+              <a:rPr lang="zh-CN" altLang="en-US" dirty="0"/>
+              <a:t>新建矢量要素演示。</a:t>
+            </a:r>
+            <a:endParaRPr lang="en-US" altLang="zh-CN" dirty="0"/>
+          </a:p>
+          <a:p>
+            <a:r>
+              <a:rPr lang="zh-CN" altLang="en-US" dirty="0"/>
+              <a:t>矢量几何和属性：结合全国行政地图说明</a:t>
+            </a:r>
+            <a:endParaRPr lang="en-US" altLang="zh-CN" dirty="0"/>
+          </a:p>
+          <a:p>
+            <a:endParaRPr lang="zh-CN" altLang="en-US" dirty="0"/>
+          </a:p>
+        </p:txBody>
+      </p:sp>
+    </p:spTree>
+    <p:extLst>
+      <p:ext uri="{BB962C8B-B14F-4D97-AF65-F5344CB8AC3E}">
+        <p14:creationId xmlns:p14="http://schemas.microsoft.com/office/powerpoint/2010/main" val="3493576218"/>
+      </p:ext>
+    </p:extLst>
+  </p:cSld>
+  <p:clrMapOvr>
+    <a:masterClrMapping/>
+  </p:clrMapOvr>
+</p:notes>
+</file>
+
+<file path=ppt/notesSlides/notesSlide21.xml><?xml version="1.0" encoding="utf-8"?>
+<p:notes xmlns:a="http://schemas.openxmlformats.org/drawingml/2006/main" xmlns:r="http://schemas.openxmlformats.org/officeDocument/2006/relationships" xmlns:p="http://schemas.openxmlformats.org/presentationml/2006/main">
+  <p:cSld>
+    <p:spTree>
+      <p:nvGrpSpPr>
+        <p:cNvPr id="1" name=""/>
+        <p:cNvGrpSpPr/>
+        <p:nvPr/>
+      </p:nvGrpSpPr>
+      <p:grpSpPr>
+        <a:xfrm>
+          <a:off x="0" y="0"/>
+          <a:ext cx="0" cy="0"/>
+          <a:chOff x="0" y="0"/>
+          <a:chExt cx="0" cy="0"/>
+        </a:xfrm>
+      </p:grpSpPr>
+      <p:sp>
+        <p:nvSpPr>
+          <p:cNvPr id="2" name="幻灯片图像占位符 1"/>
+          <p:cNvSpPr>
+            <a:spLocks noGrp="1" noRot="1" noChangeAspect="1"/>
+          </p:cNvSpPr>
+          <p:nvPr>
+            <p:ph type="sldImg"/>
+          </p:nvPr>
+        </p:nvSpPr>
+        <p:spPr>
+          <a:xfrm>
+            <a:off x="142875" y="768350"/>
+            <a:ext cx="6818313" cy="3836988"/>
+          </a:xfrm>
+        </p:spPr>
+      </p:sp>
+      <p:sp>
+        <p:nvSpPr>
+          <p:cNvPr id="3" name="备注占位符 2"/>
+          <p:cNvSpPr>
+            <a:spLocks noGrp="1"/>
+          </p:cNvSpPr>
+          <p:nvPr>
+            <p:ph type="body" idx="1"/>
+          </p:nvPr>
+        </p:nvSpPr>
+        <p:spPr/>
+        <p:txBody>
+          <a:bodyPr/>
+          <a:lstStyle/>
+          <a:p>
+            <a:r>
+              <a:rPr lang="zh-CN" altLang="en-US" dirty="0"/>
               <a:t>拓扑关系：描述空间对象之间不受几何变形影响的固有空间关系。即使几何对象被拉伸、旋转或缩放，其拓扑关系保持不变。如包含、邻接等。</a:t>
             </a:r>
           </a:p>
@@ -4482,7 +4600,7 @@
 </p:notes>
 </file>
 
-<file path=ppt/notesSlides/notesSlide21.xml><?xml version="1.0" encoding="utf-8"?>
+<file path=ppt/notesSlides/notesSlide22.xml><?xml version="1.0" encoding="utf-8"?>
 <p:notes xmlns:a="http://schemas.openxmlformats.org/drawingml/2006/main" xmlns:r="http://schemas.openxmlformats.org/officeDocument/2006/relationships" xmlns:p="http://schemas.openxmlformats.org/presentationml/2006/main">
   <p:cSld>
     <p:spTree>
@@ -4548,83 +4666,6 @@
 </p:notes>
 </file>
 
-<file path=ppt/notesSlides/notesSlide22.xml><?xml version="1.0" encoding="utf-8"?>
-<p:notes xmlns:a="http://schemas.openxmlformats.org/drawingml/2006/main" xmlns:r="http://schemas.openxmlformats.org/officeDocument/2006/relationships" xmlns:p="http://schemas.openxmlformats.org/presentationml/2006/main">
-  <p:cSld>
-    <p:spTree>
-      <p:nvGrpSpPr>
-        <p:cNvPr id="1" name=""/>
-        <p:cNvGrpSpPr/>
-        <p:nvPr/>
-      </p:nvGrpSpPr>
-      <p:grpSpPr>
-        <a:xfrm>
-          <a:off x="0" y="0"/>
-          <a:ext cx="0" cy="0"/>
-          <a:chOff x="0" y="0"/>
-          <a:chExt cx="0" cy="0"/>
-        </a:xfrm>
-      </p:grpSpPr>
-      <p:sp>
-        <p:nvSpPr>
-          <p:cNvPr id="2" name="幻灯片图像占位符 1"/>
-          <p:cNvSpPr>
-            <a:spLocks noGrp="1" noRot="1" noChangeAspect="1"/>
-          </p:cNvSpPr>
-          <p:nvPr>
-            <p:ph type="sldImg"/>
-          </p:nvPr>
-        </p:nvSpPr>
-        <p:spPr>
-          <a:xfrm>
-            <a:off x="142875" y="768350"/>
-            <a:ext cx="6818313" cy="3836988"/>
-          </a:xfrm>
-        </p:spPr>
-      </p:sp>
-      <p:sp>
-        <p:nvSpPr>
-          <p:cNvPr id="3" name="备注占位符 2"/>
-          <p:cNvSpPr>
-            <a:spLocks noGrp="1"/>
-          </p:cNvSpPr>
-          <p:nvPr>
-            <p:ph type="body" idx="1"/>
-          </p:nvPr>
-        </p:nvSpPr>
-        <p:spPr/>
-        <p:txBody>
-          <a:bodyPr/>
-          <a:lstStyle/>
-          <a:p>
-            <a:r>
-              <a:rPr lang="zh-CN" altLang="en-US" dirty="0"/>
-              <a:t>利用</a:t>
-            </a:r>
-            <a:r>
-              <a:rPr lang="en-US" altLang="zh-CN" dirty="0" err="1"/>
-              <a:t>qgis</a:t>
-            </a:r>
-            <a:r>
-              <a:rPr lang="zh-CN" altLang="en-US" dirty="0"/>
-              <a:t>软件打开昆明市遥感影像说明。</a:t>
-            </a:r>
-          </a:p>
-        </p:txBody>
-      </p:sp>
-    </p:spTree>
-    <p:extLst>
-      <p:ext uri="{BB962C8B-B14F-4D97-AF65-F5344CB8AC3E}">
-        <p14:creationId xmlns:p14="http://schemas.microsoft.com/office/powerpoint/2010/main" val="4233571644"/>
-      </p:ext>
-    </p:extLst>
-  </p:cSld>
-  <p:clrMapOvr>
-    <a:masterClrMapping/>
-  </p:clrMapOvr>
-</p:notes>
-</file>
-
 <file path=ppt/notesSlides/notesSlide23.xml><?xml version="1.0" encoding="utf-8"?>
 <p:notes xmlns:a="http://schemas.openxmlformats.org/drawingml/2006/main" xmlns:r="http://schemas.openxmlformats.org/officeDocument/2006/relationships" xmlns:p="http://schemas.openxmlformats.org/presentationml/2006/main">
   <p:cSld>
@@ -4676,6 +4717,83 @@
           <a:p>
             <a:r>
               <a:rPr lang="zh-CN" altLang="en-US" dirty="0"/>
+              <a:t>利用</a:t>
+            </a:r>
+            <a:r>
+              <a:rPr lang="en-US" altLang="zh-CN" dirty="0" err="1"/>
+              <a:t>qgis</a:t>
+            </a:r>
+            <a:r>
+              <a:rPr lang="zh-CN" altLang="en-US" dirty="0"/>
+              <a:t>软件打开昆明市遥感影像说明。</a:t>
+            </a:r>
+          </a:p>
+        </p:txBody>
+      </p:sp>
+    </p:spTree>
+    <p:extLst>
+      <p:ext uri="{BB962C8B-B14F-4D97-AF65-F5344CB8AC3E}">
+        <p14:creationId xmlns:p14="http://schemas.microsoft.com/office/powerpoint/2010/main" val="4233571644"/>
+      </p:ext>
+    </p:extLst>
+  </p:cSld>
+  <p:clrMapOvr>
+    <a:masterClrMapping/>
+  </p:clrMapOvr>
+</p:notes>
+</file>
+
+<file path=ppt/notesSlides/notesSlide24.xml><?xml version="1.0" encoding="utf-8"?>
+<p:notes xmlns:a="http://schemas.openxmlformats.org/drawingml/2006/main" xmlns:r="http://schemas.openxmlformats.org/officeDocument/2006/relationships" xmlns:p="http://schemas.openxmlformats.org/presentationml/2006/main">
+  <p:cSld>
+    <p:spTree>
+      <p:nvGrpSpPr>
+        <p:cNvPr id="1" name=""/>
+        <p:cNvGrpSpPr/>
+        <p:nvPr/>
+      </p:nvGrpSpPr>
+      <p:grpSpPr>
+        <a:xfrm>
+          <a:off x="0" y="0"/>
+          <a:ext cx="0" cy="0"/>
+          <a:chOff x="0" y="0"/>
+          <a:chExt cx="0" cy="0"/>
+        </a:xfrm>
+      </p:grpSpPr>
+      <p:sp>
+        <p:nvSpPr>
+          <p:cNvPr id="2" name="幻灯片图像占位符 1"/>
+          <p:cNvSpPr>
+            <a:spLocks noGrp="1" noRot="1" noChangeAspect="1"/>
+          </p:cNvSpPr>
+          <p:nvPr>
+            <p:ph type="sldImg"/>
+          </p:nvPr>
+        </p:nvSpPr>
+        <p:spPr>
+          <a:xfrm>
+            <a:off x="142875" y="768350"/>
+            <a:ext cx="6818313" cy="3836988"/>
+          </a:xfrm>
+        </p:spPr>
+      </p:sp>
+      <p:sp>
+        <p:nvSpPr>
+          <p:cNvPr id="3" name="备注占位符 2"/>
+          <p:cNvSpPr>
+            <a:spLocks noGrp="1"/>
+          </p:cNvSpPr>
+          <p:nvPr>
+            <p:ph type="body" idx="1"/>
+          </p:nvPr>
+        </p:nvSpPr>
+        <p:spPr/>
+        <p:txBody>
+          <a:bodyPr/>
+          <a:lstStyle/>
+          <a:p>
+            <a:r>
+              <a:rPr lang="zh-CN" altLang="en-US" dirty="0"/>
               <a:t>地表连续：地貌上，海洋</a:t>
             </a:r>
             <a:r>
@@ -4726,7 +4844,7 @@
 </p:notes>
 </file>
 
-<file path=ppt/notesSlides/notesSlide24.xml><?xml version="1.0" encoding="utf-8"?>
+<file path=ppt/notesSlides/notesSlide25.xml><?xml version="1.0" encoding="utf-8"?>
 <p:notes xmlns:a="http://schemas.openxmlformats.org/drawingml/2006/main" xmlns:r="http://schemas.openxmlformats.org/officeDocument/2006/relationships" xmlns:p="http://schemas.openxmlformats.org/presentationml/2006/main">
   <p:cSld>
     <p:spTree>
@@ -4810,7 +4928,7 @@
 </p:notes>
 </file>
 
-<file path=ppt/notesSlides/notesSlide25.xml><?xml version="1.0" encoding="utf-8"?>
+<file path=ppt/notesSlides/notesSlide26.xml><?xml version="1.0" encoding="utf-8"?>
 <p:notes xmlns:a="http://schemas.openxmlformats.org/drawingml/2006/main" xmlns:r="http://schemas.openxmlformats.org/officeDocument/2006/relationships" xmlns:p="http://schemas.openxmlformats.org/presentationml/2006/main">
   <p:cSld>
     <p:spTree>
@@ -4904,7 +5022,7 @@
 </p:notes>
 </file>
 
-<file path=ppt/notesSlides/notesSlide26.xml><?xml version="1.0" encoding="utf-8"?>
+<file path=ppt/notesSlides/notesSlide27.xml><?xml version="1.0" encoding="utf-8"?>
 <p:notes xmlns:a="http://schemas.openxmlformats.org/drawingml/2006/main" xmlns:r="http://schemas.openxmlformats.org/officeDocument/2006/relationships" xmlns:p="http://schemas.openxmlformats.org/presentationml/2006/main">
   <p:cSld>
     <p:spTree>
@@ -5019,10 +5137,10 @@
           <a:bodyPr/>
           <a:lstStyle/>
           <a:p>
-            <a:r>
-              <a:rPr lang="zh-CN" altLang="en-US" dirty="0"/>
-              <a:t>空间数据举例；</a:t>
-            </a:r>
+            <a:pPr marL="0" indent="0">
+              <a:buNone/>
+            </a:pPr>
+            <a:endParaRPr lang="zh-CN" altLang="en-US" dirty="0"/>
           </a:p>
         </p:txBody>
       </p:sp>
@@ -5040,6 +5158,106 @@
 </file>
 
 <file path=ppt/notesSlides/notesSlide4.xml><?xml version="1.0" encoding="utf-8"?>
+<p:notes xmlns:a="http://schemas.openxmlformats.org/drawingml/2006/main" xmlns:r="http://schemas.openxmlformats.org/officeDocument/2006/relationships" xmlns:p="http://schemas.openxmlformats.org/presentationml/2006/main">
+  <p:cSld>
+    <p:spTree>
+      <p:nvGrpSpPr>
+        <p:cNvPr id="1" name="">
+          <a:extLst>
+            <a:ext uri="{FF2B5EF4-FFF2-40B4-BE49-F238E27FC236}">
+              <a16:creationId xmlns:a16="http://schemas.microsoft.com/office/drawing/2014/main" id="{3BD2A072-1FB1-2CE1-BD24-35C467CC52C1}"/>
+            </a:ext>
+          </a:extLst>
+        </p:cNvPr>
+        <p:cNvGrpSpPr/>
+        <p:nvPr/>
+      </p:nvGrpSpPr>
+      <p:grpSpPr>
+        <a:xfrm>
+          <a:off x="0" y="0"/>
+          <a:ext cx="0" cy="0"/>
+          <a:chOff x="0" y="0"/>
+          <a:chExt cx="0" cy="0"/>
+        </a:xfrm>
+      </p:grpSpPr>
+      <p:sp>
+        <p:nvSpPr>
+          <p:cNvPr id="2" name="幻灯片图像占位符 1">
+            <a:extLst>
+              <a:ext uri="{FF2B5EF4-FFF2-40B4-BE49-F238E27FC236}">
+                <a16:creationId xmlns:a16="http://schemas.microsoft.com/office/drawing/2014/main" id="{B2D46751-2F5C-116A-F8FD-544E0A3F378B}"/>
+              </a:ext>
+            </a:extLst>
+          </p:cNvPr>
+          <p:cNvSpPr>
+            <a:spLocks noGrp="1" noRot="1" noChangeAspect="1"/>
+          </p:cNvSpPr>
+          <p:nvPr>
+            <p:ph type="sldImg"/>
+          </p:nvPr>
+        </p:nvSpPr>
+        <p:spPr>
+          <a:xfrm>
+            <a:off x="142875" y="768350"/>
+            <a:ext cx="6818313" cy="3836988"/>
+          </a:xfrm>
+        </p:spPr>
+      </p:sp>
+      <p:sp>
+        <p:nvSpPr>
+          <p:cNvPr id="3" name="备注占位符 2">
+            <a:extLst>
+              <a:ext uri="{FF2B5EF4-FFF2-40B4-BE49-F238E27FC236}">
+                <a16:creationId xmlns:a16="http://schemas.microsoft.com/office/drawing/2014/main" id="{D5598D7E-ABD3-6E2B-081C-91CF141C8B2C}"/>
+              </a:ext>
+            </a:extLst>
+          </p:cNvPr>
+          <p:cNvSpPr>
+            <a:spLocks noGrp="1"/>
+          </p:cNvSpPr>
+          <p:nvPr>
+            <p:ph type="body" idx="1"/>
+          </p:nvPr>
+        </p:nvSpPr>
+        <p:spPr/>
+        <p:txBody>
+          <a:bodyPr/>
+          <a:lstStyle/>
+          <a:p>
+            <a:pPr marL="228600" indent="-228600">
+              <a:buAutoNum type="arabicPeriod"/>
+            </a:pPr>
+            <a:r>
+              <a:rPr lang="zh-CN" altLang="en-US" dirty="0"/>
+              <a:t>数据科学重要性，支撑评价与决策；</a:t>
+            </a:r>
+            <a:endParaRPr lang="en-US" altLang="zh-CN" dirty="0"/>
+          </a:p>
+          <a:p>
+            <a:pPr marL="228600" indent="-228600">
+              <a:buAutoNum type="arabicPeriod"/>
+            </a:pPr>
+            <a:r>
+              <a:rPr lang="zh-CN" altLang="en-US" dirty="0"/>
+              <a:t>空间数据概念。</a:t>
+            </a:r>
+          </a:p>
+        </p:txBody>
+      </p:sp>
+    </p:spTree>
+    <p:extLst>
+      <p:ext uri="{BB962C8B-B14F-4D97-AF65-F5344CB8AC3E}">
+        <p14:creationId xmlns:p14="http://schemas.microsoft.com/office/powerpoint/2010/main" val="1928997356"/>
+      </p:ext>
+    </p:extLst>
+  </p:cSld>
+  <p:clrMapOvr>
+    <a:masterClrMapping/>
+  </p:clrMapOvr>
+</p:notes>
+</file>
+
+<file path=ppt/notesSlides/notesSlide5.xml><?xml version="1.0" encoding="utf-8"?>
 <p:notes xmlns:a="http://schemas.openxmlformats.org/drawingml/2006/main" xmlns:r="http://schemas.openxmlformats.org/officeDocument/2006/relationships" xmlns:p="http://schemas.openxmlformats.org/presentationml/2006/main">
   <p:cSld>
     <p:spTree>
@@ -5212,7 +5430,7 @@
 </p:notes>
 </file>
 
-<file path=ppt/notesSlides/notesSlide5.xml><?xml version="1.0" encoding="utf-8"?>
+<file path=ppt/notesSlides/notesSlide6.xml><?xml version="1.0" encoding="utf-8"?>
 <p:notes xmlns:a="http://schemas.openxmlformats.org/drawingml/2006/main" xmlns:r="http://schemas.openxmlformats.org/officeDocument/2006/relationships" xmlns:p="http://schemas.openxmlformats.org/presentationml/2006/main">
   <p:cSld>
     <p:spTree>
@@ -5278,7 +5496,7 @@
 </p:notes>
 </file>
 
-<file path=ppt/notesSlides/notesSlide6.xml><?xml version="1.0" encoding="utf-8"?>
+<file path=ppt/notesSlides/notesSlide7.xml><?xml version="1.0" encoding="utf-8"?>
 <p:notes xmlns:a="http://schemas.openxmlformats.org/drawingml/2006/main" xmlns:r="http://schemas.openxmlformats.org/officeDocument/2006/relationships" xmlns:p="http://schemas.openxmlformats.org/presentationml/2006/main">
   <p:cSld>
     <p:spTree>
@@ -5351,7 +5569,7 @@
 </p:notes>
 </file>
 
-<file path=ppt/notesSlides/notesSlide7.xml><?xml version="1.0" encoding="utf-8"?>
+<file path=ppt/notesSlides/notesSlide8.xml><?xml version="1.0" encoding="utf-8"?>
 <p:notes xmlns:a="http://schemas.openxmlformats.org/drawingml/2006/main" xmlns:r="http://schemas.openxmlformats.org/officeDocument/2006/relationships" xmlns:p="http://schemas.openxmlformats.org/presentationml/2006/main">
   <p:cSld>
     <p:spTree>
@@ -5417,7 +5635,7 @@
 </p:notes>
 </file>
 
-<file path=ppt/notesSlides/notesSlide8.xml><?xml version="1.0" encoding="utf-8"?>
+<file path=ppt/notesSlides/notesSlide9.xml><?xml version="1.0" encoding="utf-8"?>
 <p:notes xmlns:a="http://schemas.openxmlformats.org/drawingml/2006/main" xmlns:r="http://schemas.openxmlformats.org/officeDocument/2006/relationships" xmlns:p="http://schemas.openxmlformats.org/presentationml/2006/main">
   <p:cSld>
     <p:spTree>
@@ -5474,123 +5692,6 @@
     <p:extLst>
       <p:ext uri="{BB962C8B-B14F-4D97-AF65-F5344CB8AC3E}">
         <p14:creationId xmlns:p14="http://schemas.microsoft.com/office/powerpoint/2010/main" val="2247650969"/>
-      </p:ext>
-    </p:extLst>
-  </p:cSld>
-  <p:clrMapOvr>
-    <a:masterClrMapping/>
-  </p:clrMapOvr>
-</p:notes>
-</file>
-
-<file path=ppt/notesSlides/notesSlide9.xml><?xml version="1.0" encoding="utf-8"?>
-<p:notes xmlns:a="http://schemas.openxmlformats.org/drawingml/2006/main" xmlns:r="http://schemas.openxmlformats.org/officeDocument/2006/relationships" xmlns:p="http://schemas.openxmlformats.org/presentationml/2006/main">
-  <p:cSld>
-    <p:spTree>
-      <p:nvGrpSpPr>
-        <p:cNvPr id="1" name=""/>
-        <p:cNvGrpSpPr/>
-        <p:nvPr/>
-      </p:nvGrpSpPr>
-      <p:grpSpPr>
-        <a:xfrm>
-          <a:off x="0" y="0"/>
-          <a:ext cx="0" cy="0"/>
-          <a:chOff x="0" y="0"/>
-          <a:chExt cx="0" cy="0"/>
-        </a:xfrm>
-      </p:grpSpPr>
-      <p:sp>
-        <p:nvSpPr>
-          <p:cNvPr id="8193" name="Rectangle 2"/>
-          <p:cNvSpPr>
-            <a:spLocks noGrp="1" noRot="1" noChangeAspect="1" noChangeArrowheads="1" noTextEdit="1"/>
-          </p:cNvSpPr>
-          <p:nvPr>
-            <p:ph type="sldImg"/>
-          </p:nvPr>
-        </p:nvSpPr>
-        <p:spPr>
-          <a:xfrm>
-            <a:off x="142875" y="768350"/>
-            <a:ext cx="6818313" cy="3836988"/>
-          </a:xfrm>
-          <a:ln/>
-        </p:spPr>
-      </p:sp>
-      <p:sp>
-        <p:nvSpPr>
-          <p:cNvPr id="8194" name="Rectangle 3"/>
-          <p:cNvSpPr>
-            <a:spLocks noGrp="1" noChangeArrowheads="1"/>
-          </p:cNvSpPr>
-          <p:nvPr>
-            <p:ph type="body" idx="1"/>
-          </p:nvPr>
-        </p:nvSpPr>
-        <p:spPr>
-          <a:noFill/>
-          <a:ln/>
-          <a:extLst>
-            <a:ext uri="{909E8E84-426E-40DD-AFC4-6F175D3DCCD1}">
-              <a14:hiddenFill xmlns:a14="http://schemas.microsoft.com/office/drawing/2010/main">
-                <a:solidFill>
-                  <a:srgbClr val="FFFFFF"/>
-                </a:solidFill>
-              </a14:hiddenFill>
-            </a:ext>
-            <a:ext uri="{91240B29-F687-4F45-9708-019B960494DF}">
-              <a14:hiddenLine xmlns:a14="http://schemas.microsoft.com/office/drawing/2010/main" w="9525">
-                <a:solidFill>
-                  <a:srgbClr val="000000"/>
-                </a:solidFill>
-                <a:miter lim="800000"/>
-                <a:headEnd/>
-                <a:tailEnd/>
-              </a14:hiddenLine>
-            </a:ext>
-            <a:ext uri="{FAA26D3D-D897-4be2-8F04-BA451C77F1D7}">
-              <ma14:placeholderFlag xmlns:ma14="http://schemas.microsoft.com/office/mac/drawingml/2011/main" xmlns="" val="1"/>
-            </a:ext>
-          </a:extLst>
-        </p:spPr>
-        <p:txBody>
-          <a:bodyPr/>
-          <a:lstStyle/>
-          <a:p>
-            <a:pPr marL="0" marR="0" indent="0" algn="l" defTabSz="914400" rtl="0" eaLnBrk="0" fontAlgn="base" latinLnBrk="0" hangingPunct="0">
-              <a:lnSpc>
-                <a:spcPct val="100000"/>
-              </a:lnSpc>
-              <a:spcBef>
-                <a:spcPct val="30000"/>
-              </a:spcBef>
-              <a:spcAft>
-                <a:spcPct val="0"/>
-              </a:spcAft>
-              <a:buClrTx/>
-              <a:buSzTx/>
-              <a:buFontTx/>
-              <a:buNone/>
-              <a:tabLst/>
-              <a:defRPr/>
-            </a:pPr>
-            <a:endParaRPr kumimoji="1" lang="zh-CN" altLang="zh-CN" sz="1200" kern="1200">
-              <a:solidFill>
-                <a:schemeClr val="tx1"/>
-              </a:solidFill>
-              <a:effectLst/>
-              <a:latin typeface="Arial" charset="0"/>
-              <a:ea typeface="宋体" pitchFamily="2" charset="-122"/>
-              <a:cs typeface="宋体" charset="0"/>
-            </a:endParaRPr>
-          </a:p>
-        </p:txBody>
-      </p:sp>
-    </p:spTree>
-    <p:extLst>
-      <p:ext uri="{BB962C8B-B14F-4D97-AF65-F5344CB8AC3E}">
-        <p14:creationId xmlns:p14="http://schemas.microsoft.com/office/powerpoint/2010/main" val="4128186715"/>
       </p:ext>
     </p:extLst>
   </p:cSld>
@@ -7414,7 +7515,7 @@
               </a14:hiddenLine>
             </a:ext>
             <a:ext uri="{FAA26D3D-D897-4be2-8F04-BA451C77F1D7}">
-              <ma14:placeholderFlag xmlns:ma14="http://schemas.microsoft.com/office/mac/drawingml/2011/main" xmlns="" val="1"/>
+              <ma14:placeholderFlag xmlns="" xmlns:ma14="http://schemas.microsoft.com/office/mac/drawingml/2011/main" val="1"/>
             </a:ext>
           </a:extLst>
         </p:spPr>
@@ -11110,7 +11211,7 @@
               </a14:hiddenLine>
             </a:ext>
             <a:ext uri="{FAA26D3D-D897-4be2-8F04-BA451C77F1D7}">
-              <ma14:placeholderFlag xmlns:ma14="http://schemas.microsoft.com/office/mac/drawingml/2011/main" xmlns="" val="1"/>
+              <ma14:placeholderFlag xmlns="" xmlns:ma14="http://schemas.microsoft.com/office/mac/drawingml/2011/main" val="1"/>
             </a:ext>
           </a:extLst>
         </p:spPr>
@@ -13140,6 +13241,639 @@
 <file path=ppt/slides/slide10.xml><?xml version="1.0" encoding="utf-8"?>
 <p:sld xmlns:a="http://schemas.openxmlformats.org/drawingml/2006/main" xmlns:r="http://schemas.openxmlformats.org/officeDocument/2006/relationships" xmlns:p="http://schemas.openxmlformats.org/presentationml/2006/main" showMasterSp="0">
   <p:cSld>
+    <p:bg>
+      <p:bgPr>
+        <a:solidFill>
+          <a:schemeClr val="tx1">
+            <a:lumMod val="95000"/>
+          </a:schemeClr>
+        </a:solidFill>
+        <a:effectLst/>
+      </p:bgPr>
+    </p:bg>
+    <p:spTree>
+      <p:nvGrpSpPr>
+        <p:cNvPr id="1" name=""/>
+        <p:cNvGrpSpPr/>
+        <p:nvPr/>
+      </p:nvGrpSpPr>
+      <p:grpSpPr>
+        <a:xfrm>
+          <a:off x="0" y="0"/>
+          <a:ext cx="0" cy="0"/>
+          <a:chOff x="0" y="0"/>
+          <a:chExt cx="0" cy="0"/>
+        </a:xfrm>
+      </p:grpSpPr>
+      <p:sp>
+        <p:nvSpPr>
+          <p:cNvPr id="24" name="Rectangle 7"/>
+          <p:cNvSpPr>
+            <a:spLocks noChangeArrowheads="1"/>
+          </p:cNvSpPr>
+          <p:nvPr/>
+        </p:nvSpPr>
+        <p:spPr bwMode="auto">
+          <a:xfrm>
+            <a:off x="1843693" y="1685332"/>
+            <a:ext cx="8501204" cy="1917543"/>
+          </a:xfrm>
+          <a:prstGeom prst="rect">
+            <a:avLst/>
+          </a:prstGeom>
+          <a:noFill/>
+          <a:ln>
+            <a:noFill/>
+          </a:ln>
+          <a:extLst>
+            <a:ext uri="{909E8E84-426E-40DD-AFC4-6F175D3DCCD1}">
+              <a14:hiddenFill xmlns:a14="http://schemas.microsoft.com/office/drawing/2010/main">
+                <a:solidFill>
+                  <a:srgbClr val="FFFFFF"/>
+                </a:solidFill>
+              </a14:hiddenFill>
+            </a:ext>
+            <a:ext uri="{91240B29-F687-4F45-9708-019B960494DF}">
+              <a14:hiddenLine xmlns:a14="http://schemas.microsoft.com/office/drawing/2010/main" w="9525">
+                <a:solidFill>
+                  <a:srgbClr val="000000"/>
+                </a:solidFill>
+                <a:miter lim="800000"/>
+                <a:headEnd/>
+                <a:tailEnd/>
+              </a14:hiddenLine>
+            </a:ext>
+          </a:extLst>
+        </p:spPr>
+        <p:txBody>
+          <a:bodyPr anchor="ctr"/>
+          <a:lstStyle/>
+          <a:p>
+            <a:pPr>
+              <a:defRPr/>
+            </a:pPr>
+            <a:r>
+              <a:rPr lang="zh-CN" altLang="en-US" sz="4800" b="1" dirty="0">
+                <a:solidFill>
+                  <a:srgbClr val="FF0000"/>
+                </a:solidFill>
+                <a:latin typeface="微软雅黑"/>
+                <a:ea typeface="微软雅黑"/>
+              </a:rPr>
+              <a:t>空间数据基本概念</a:t>
+            </a:r>
+            <a:endParaRPr lang="zh-CN" altLang="zh-CN" sz="4800" b="1" dirty="0">
+              <a:solidFill>
+                <a:srgbClr val="FF0000"/>
+              </a:solidFill>
+              <a:latin typeface="微软雅黑"/>
+              <a:ea typeface="微软雅黑"/>
+            </a:endParaRPr>
+          </a:p>
+        </p:txBody>
+      </p:sp>
+      <p:sp>
+        <p:nvSpPr>
+          <p:cNvPr id="25" name="Rectangle 8"/>
+          <p:cNvSpPr>
+            <a:spLocks noChangeArrowheads="1"/>
+          </p:cNvSpPr>
+          <p:nvPr/>
+        </p:nvSpPr>
+        <p:spPr bwMode="auto">
+          <a:xfrm>
+            <a:off x="1677909" y="3931738"/>
+            <a:ext cx="8809022" cy="1439862"/>
+          </a:xfrm>
+          <a:prstGeom prst="rect">
+            <a:avLst/>
+          </a:prstGeom>
+          <a:noFill/>
+          <a:ln>
+            <a:noFill/>
+          </a:ln>
+          <a:extLst>
+            <a:ext uri="{909E8E84-426E-40DD-AFC4-6F175D3DCCD1}">
+              <a14:hiddenFill xmlns:a14="http://schemas.microsoft.com/office/drawing/2010/main">
+                <a:solidFill>
+                  <a:srgbClr val="FFFFFF"/>
+                </a:solidFill>
+              </a14:hiddenFill>
+            </a:ext>
+            <a:ext uri="{91240B29-F687-4F45-9708-019B960494DF}">
+              <a14:hiddenLine xmlns:a14="http://schemas.microsoft.com/office/drawing/2010/main" w="9525">
+                <a:solidFill>
+                  <a:srgbClr val="000000"/>
+                </a:solidFill>
+                <a:miter lim="800000"/>
+                <a:headEnd/>
+                <a:tailEnd/>
+              </a14:hiddenLine>
+            </a:ext>
+          </a:extLst>
+        </p:spPr>
+        <p:txBody>
+          <a:bodyPr/>
+          <a:lstStyle/>
+          <a:p>
+            <a:pPr>
+              <a:lnSpc>
+                <a:spcPct val="150000"/>
+              </a:lnSpc>
+              <a:spcBef>
+                <a:spcPts val="0"/>
+              </a:spcBef>
+              <a:buSzPct val="80000"/>
+              <a:defRPr/>
+            </a:pPr>
+            <a:r>
+              <a:rPr lang="zh-CN" altLang="en-US" b="1">
+                <a:solidFill>
+                  <a:srgbClr val="002060"/>
+                </a:solidFill>
+                <a:latin typeface="微软雅黑"/>
+                <a:ea typeface="微软雅黑"/>
+                <a:cs typeface="微软雅黑" charset="0"/>
+              </a:rPr>
+              <a:t>罗 新</a:t>
+            </a:r>
+            <a:endParaRPr lang="en-US" altLang="zh-CN" b="1">
+              <a:solidFill>
+                <a:srgbClr val="002060"/>
+              </a:solidFill>
+              <a:latin typeface="微软雅黑"/>
+              <a:ea typeface="微软雅黑"/>
+              <a:cs typeface="微软雅黑" charset="0"/>
+            </a:endParaRPr>
+          </a:p>
+          <a:p>
+            <a:pPr>
+              <a:lnSpc>
+                <a:spcPct val="150000"/>
+              </a:lnSpc>
+              <a:spcBef>
+                <a:spcPts val="0"/>
+              </a:spcBef>
+              <a:buSzPct val="80000"/>
+              <a:defRPr/>
+            </a:pPr>
+            <a:r>
+              <a:rPr lang="zh-CN" altLang="en-US" b="1">
+                <a:solidFill>
+                  <a:srgbClr val="002060"/>
+                </a:solidFill>
+                <a:latin typeface="微软雅黑"/>
+                <a:ea typeface="微软雅黑"/>
+                <a:cs typeface="微软雅黑" charset="0"/>
+              </a:rPr>
+              <a:t>云南大学 地球科学学院</a:t>
+            </a:r>
+            <a:endParaRPr lang="en-US" altLang="zh-CN" b="1">
+              <a:solidFill>
+                <a:srgbClr val="002060"/>
+              </a:solidFill>
+              <a:latin typeface="微软雅黑"/>
+              <a:ea typeface="微软雅黑"/>
+              <a:cs typeface="微软雅黑" charset="0"/>
+            </a:endParaRPr>
+          </a:p>
+          <a:p>
+            <a:pPr>
+              <a:lnSpc>
+                <a:spcPct val="150000"/>
+              </a:lnSpc>
+              <a:spcBef>
+                <a:spcPts val="0"/>
+              </a:spcBef>
+              <a:buSzPct val="80000"/>
+              <a:defRPr/>
+            </a:pPr>
+            <a:endParaRPr lang="zh-CN" altLang="en-US" sz="2800" b="1">
+              <a:solidFill>
+                <a:srgbClr val="002060"/>
+              </a:solidFill>
+              <a:latin typeface="微软雅黑"/>
+              <a:ea typeface="微软雅黑"/>
+              <a:cs typeface="微软雅黑" charset="0"/>
+            </a:endParaRPr>
+          </a:p>
+          <a:p>
+            <a:pPr>
+              <a:lnSpc>
+                <a:spcPct val="120000"/>
+              </a:lnSpc>
+              <a:spcBef>
+                <a:spcPts val="0"/>
+              </a:spcBef>
+              <a:spcAft>
+                <a:spcPts val="0"/>
+              </a:spcAft>
+              <a:buSzPct val="80000"/>
+              <a:defRPr/>
+            </a:pPr>
+            <a:endParaRPr lang="en-US" altLang="zh-CN" sz="2000">
+              <a:solidFill>
+                <a:srgbClr val="002060"/>
+              </a:solidFill>
+              <a:latin typeface="微软雅黑"/>
+              <a:ea typeface="微软雅黑"/>
+              <a:cs typeface="微软雅黑" charset="0"/>
+            </a:endParaRPr>
+          </a:p>
+          <a:p>
+            <a:pPr>
+              <a:lnSpc>
+                <a:spcPct val="120000"/>
+              </a:lnSpc>
+              <a:spcBef>
+                <a:spcPts val="0"/>
+              </a:spcBef>
+              <a:spcAft>
+                <a:spcPts val="0"/>
+              </a:spcAft>
+              <a:buSzPct val="80000"/>
+              <a:defRPr/>
+            </a:pPr>
+            <a:endParaRPr lang="en-US" altLang="zh-CN" sz="2000">
+              <a:solidFill>
+                <a:srgbClr val="002060"/>
+              </a:solidFill>
+              <a:latin typeface="微软雅黑"/>
+              <a:ea typeface="微软雅黑"/>
+              <a:cs typeface="微软雅黑" charset="0"/>
+            </a:endParaRPr>
+          </a:p>
+          <a:p>
+            <a:pPr>
+              <a:lnSpc>
+                <a:spcPct val="120000"/>
+              </a:lnSpc>
+              <a:spcBef>
+                <a:spcPts val="0"/>
+              </a:spcBef>
+              <a:spcAft>
+                <a:spcPts val="0"/>
+              </a:spcAft>
+              <a:buSzPct val="80000"/>
+              <a:defRPr/>
+            </a:pPr>
+            <a:endParaRPr lang="en-US" altLang="zh-CN" sz="1800">
+              <a:solidFill>
+                <a:srgbClr val="002060"/>
+              </a:solidFill>
+              <a:latin typeface="微软雅黑"/>
+              <a:ea typeface="微软雅黑"/>
+              <a:cs typeface="微软雅黑" charset="0"/>
+            </a:endParaRPr>
+          </a:p>
+        </p:txBody>
+      </p:sp>
+      <p:sp>
+        <p:nvSpPr>
+          <p:cNvPr id="54" name="矩形 53"/>
+          <p:cNvSpPr/>
+          <p:nvPr/>
+        </p:nvSpPr>
+        <p:spPr>
+          <a:xfrm flipV="1">
+            <a:off x="2316000" y="3614405"/>
+            <a:ext cx="7560000" cy="45719"/>
+          </a:xfrm>
+          <a:prstGeom prst="rect">
+            <a:avLst/>
+          </a:prstGeom>
+          <a:gradFill flip="none" rotWithShape="1">
+            <a:gsLst>
+              <a:gs pos="0">
+                <a:schemeClr val="accent1">
+                  <a:tint val="66000"/>
+                  <a:satMod val="160000"/>
+                  <a:lumMod val="0"/>
+                  <a:lumOff val="100000"/>
+                  <a:alpha val="0"/>
+                </a:schemeClr>
+              </a:gs>
+              <a:gs pos="50000">
+                <a:schemeClr val="accent1"/>
+              </a:gs>
+              <a:gs pos="100000">
+                <a:schemeClr val="accent1">
+                  <a:tint val="23500"/>
+                  <a:satMod val="160000"/>
+                  <a:lumMod val="0"/>
+                  <a:lumOff val="100000"/>
+                  <a:alpha val="0"/>
+                </a:schemeClr>
+              </a:gs>
+            </a:gsLst>
+            <a:lin ang="10800000" scaled="1"/>
+            <a:tileRect/>
+          </a:gradFill>
+        </p:spPr>
+        <p:txBody>
+          <a:bodyPr wrap="square" lIns="0" rtlCol="0" anchor="ctr">
+            <a:noAutofit/>
+          </a:bodyPr>
+          <a:lstStyle/>
+          <a:p>
+            <a:pPr algn="l">
+              <a:defRPr/>
+            </a:pPr>
+            <a:endParaRPr lang="zh-CN" altLang="en-US" b="1">
+              <a:solidFill>
+                <a:srgbClr val="FF0000"/>
+              </a:solidFill>
+              <a:latin typeface="微软雅黑" pitchFamily="34" charset="-122"/>
+              <a:ea typeface="微软雅黑" pitchFamily="34" charset="-122"/>
+            </a:endParaRPr>
+          </a:p>
+        </p:txBody>
+      </p:sp>
+      <p:sp>
+        <p:nvSpPr>
+          <p:cNvPr id="2" name="Rectangle 1">
+            <a:extLst>
+              <a:ext uri="{FF2B5EF4-FFF2-40B4-BE49-F238E27FC236}">
+                <a16:creationId xmlns:a16="http://schemas.microsoft.com/office/drawing/2014/main" id="{C2515BE6-09AD-694B-8839-0C2DC98FAD34}"/>
+              </a:ext>
+            </a:extLst>
+          </p:cNvPr>
+          <p:cNvSpPr/>
+          <p:nvPr/>
+        </p:nvSpPr>
+        <p:spPr>
+          <a:xfrm>
+            <a:off x="1831819" y="5474698"/>
+            <a:ext cx="8627953" cy="784830"/>
+          </a:xfrm>
+          <a:prstGeom prst="rect">
+            <a:avLst/>
+          </a:prstGeom>
+        </p:spPr>
+        <p:txBody>
+          <a:bodyPr wrap="square">
+            <a:spAutoFit/>
+          </a:bodyPr>
+          <a:lstStyle/>
+          <a:p>
+            <a:pPr>
+              <a:defRPr/>
+            </a:pPr>
+            <a:r>
+              <a:rPr lang="en-US" sz="1800">
+                <a:solidFill>
+                  <a:prstClr val="black"/>
+                </a:solidFill>
+                <a:latin typeface="微软雅黑"/>
+                <a:ea typeface="微软雅黑"/>
+              </a:rPr>
+              <a:t>邮箱</a:t>
+            </a:r>
+            <a:r>
+              <a:rPr lang="en-CN" sz="1800">
+                <a:solidFill>
+                  <a:prstClr val="black"/>
+                </a:solidFill>
+                <a:latin typeface="微软雅黑"/>
+                <a:ea typeface="微软雅黑"/>
+              </a:rPr>
+              <a:t>: xinluo_xin@ynu.edu.cn</a:t>
+            </a:r>
+          </a:p>
+          <a:p>
+            <a:pPr>
+              <a:defRPr/>
+            </a:pPr>
+            <a:r>
+              <a:rPr lang="en-CN" sz="1800">
+                <a:solidFill>
+                  <a:prstClr val="black"/>
+                </a:solidFill>
+                <a:latin typeface="微软雅黑"/>
+                <a:ea typeface="微软雅黑"/>
+              </a:rPr>
+              <a:t>地址</a:t>
+            </a:r>
+            <a:r>
+              <a:rPr lang="zh-CN" altLang="en-US" sz="1800">
+                <a:solidFill>
+                  <a:prstClr val="black"/>
+                </a:solidFill>
+                <a:latin typeface="微软雅黑"/>
+                <a:ea typeface="微软雅黑"/>
+              </a:rPr>
+              <a:t>：地球科学学院</a:t>
+            </a:r>
+            <a:r>
+              <a:rPr lang="en-US" altLang="zh-CN" sz="1800">
+                <a:solidFill>
+                  <a:prstClr val="black"/>
+                </a:solidFill>
+                <a:latin typeface="微软雅黑"/>
+                <a:ea typeface="微软雅黑"/>
+              </a:rPr>
+              <a:t>1327</a:t>
+            </a:r>
+            <a:r>
+              <a:rPr lang="zh-CN" altLang="en-US" sz="1800">
+                <a:solidFill>
+                  <a:prstClr val="black"/>
+                </a:solidFill>
+                <a:latin typeface="微软雅黑"/>
+                <a:ea typeface="微软雅黑"/>
+              </a:rPr>
+              <a:t>办公室</a:t>
+            </a:r>
+            <a:endParaRPr lang="en-CN" sz="1800">
+              <a:solidFill>
+                <a:prstClr val="black"/>
+              </a:solidFill>
+              <a:latin typeface="微软雅黑"/>
+              <a:ea typeface="微软雅黑"/>
+            </a:endParaRPr>
+          </a:p>
+        </p:txBody>
+      </p:sp>
+      <p:pic>
+        <p:nvPicPr>
+          <p:cNvPr id="4" name="Picture 3">
+            <a:extLst>
+              <a:ext uri="{FF2B5EF4-FFF2-40B4-BE49-F238E27FC236}">
+                <a16:creationId xmlns:a16="http://schemas.microsoft.com/office/drawing/2014/main" id="{C5A20417-E7CA-C285-EB98-9BD26873E83E}"/>
+              </a:ext>
+            </a:extLst>
+          </p:cNvPr>
+          <p:cNvPicPr>
+            <a:picLocks noChangeAspect="1"/>
+          </p:cNvPicPr>
+          <p:nvPr/>
+        </p:nvPicPr>
+        <p:blipFill>
+          <a:blip r:embed="rId3"/>
+          <a:stretch>
+            <a:fillRect/>
+          </a:stretch>
+        </p:blipFill>
+        <p:spPr>
+          <a:xfrm>
+            <a:off x="1843694" y="243145"/>
+            <a:ext cx="2866773" cy="1012641"/>
+          </a:xfrm>
+          <a:prstGeom prst="rect">
+            <a:avLst/>
+          </a:prstGeom>
+        </p:spPr>
+      </p:pic>
+      <p:pic>
+        <p:nvPicPr>
+          <p:cNvPr id="9" name="Picture 8">
+            <a:extLst>
+              <a:ext uri="{FF2B5EF4-FFF2-40B4-BE49-F238E27FC236}">
+                <a16:creationId xmlns:a16="http://schemas.microsoft.com/office/drawing/2014/main" id="{D79EB157-7CF0-C636-5797-94C0A73AF8D4}"/>
+              </a:ext>
+            </a:extLst>
+          </p:cNvPr>
+          <p:cNvPicPr>
+            <a:picLocks noChangeAspect="1"/>
+          </p:cNvPicPr>
+          <p:nvPr/>
+        </p:nvPicPr>
+        <p:blipFill>
+          <a:blip r:embed="rId4"/>
+          <a:stretch>
+            <a:fillRect/>
+          </a:stretch>
+        </p:blipFill>
+        <p:spPr>
+          <a:xfrm>
+            <a:off x="7686262" y="6259528"/>
+            <a:ext cx="2996979" cy="622992"/>
+          </a:xfrm>
+          <a:prstGeom prst="rect">
+            <a:avLst/>
+          </a:prstGeom>
+        </p:spPr>
+      </p:pic>
+      <p:sp>
+        <p:nvSpPr>
+          <p:cNvPr id="3" name="TextBox 2">
+            <a:extLst>
+              <a:ext uri="{FF2B5EF4-FFF2-40B4-BE49-F238E27FC236}">
+                <a16:creationId xmlns:a16="http://schemas.microsoft.com/office/drawing/2014/main" id="{E375549C-74EF-2C8F-6432-2C52B803FB1B}"/>
+              </a:ext>
+            </a:extLst>
+          </p:cNvPr>
+          <p:cNvSpPr txBox="1"/>
+          <p:nvPr/>
+        </p:nvSpPr>
+        <p:spPr>
+          <a:xfrm>
+            <a:off x="6492823" y="261082"/>
+            <a:ext cx="4217822" cy="369332"/>
+          </a:xfrm>
+          <a:prstGeom prst="rect">
+            <a:avLst/>
+          </a:prstGeom>
+          <a:noFill/>
+        </p:spPr>
+        <p:txBody>
+          <a:bodyPr wrap="none" rtlCol="0">
+            <a:spAutoFit/>
+          </a:bodyPr>
+          <a:lstStyle/>
+          <a:p>
+            <a:r>
+              <a:rPr lang="en-CN" sz="1800" b="1" dirty="0">
+                <a:solidFill>
+                  <a:schemeClr val="bg2"/>
+                </a:solidFill>
+                <a:latin typeface="+mn-ea"/>
+                <a:ea typeface="+mn-ea"/>
+              </a:rPr>
+              <a:t>云南大学</a:t>
+            </a:r>
+            <a:r>
+              <a:rPr lang="en-US" altLang="zh-CN" sz="1800" b="1" dirty="0">
+                <a:solidFill>
+                  <a:schemeClr val="bg2"/>
+                </a:solidFill>
+                <a:latin typeface="+mn-ea"/>
+                <a:ea typeface="+mn-ea"/>
+              </a:rPr>
+              <a:t>《</a:t>
+            </a:r>
+            <a:r>
+              <a:rPr lang="en-CN" sz="1800" b="1" dirty="0">
+                <a:solidFill>
+                  <a:schemeClr val="bg2"/>
+                </a:solidFill>
+                <a:latin typeface="+mn-ea"/>
+                <a:ea typeface="+mn-ea"/>
+              </a:rPr>
+              <a:t> 空间数据处理 </a:t>
+            </a:r>
+            <a:r>
+              <a:rPr lang="en-US" altLang="zh-CN" sz="1800" b="1" dirty="0">
+                <a:solidFill>
+                  <a:schemeClr val="bg2"/>
+                </a:solidFill>
+                <a:latin typeface="+mn-ea"/>
+                <a:ea typeface="+mn-ea"/>
+              </a:rPr>
+              <a:t>》</a:t>
+            </a:r>
+            <a:r>
+              <a:rPr lang="en-CN" sz="1800" b="1" dirty="0">
+                <a:solidFill>
+                  <a:schemeClr val="bg2"/>
+                </a:solidFill>
+                <a:latin typeface="+mn-ea"/>
+                <a:ea typeface="+mn-ea"/>
+              </a:rPr>
+              <a:t>课程第</a:t>
+            </a:r>
+            <a:r>
+              <a:rPr lang="zh-CN" altLang="en-US" sz="1800" b="1" dirty="0">
+                <a:solidFill>
+                  <a:schemeClr val="bg2"/>
+                </a:solidFill>
+                <a:latin typeface="+mn-ea"/>
+                <a:ea typeface="+mn-ea"/>
+              </a:rPr>
+              <a:t>一</a:t>
+            </a:r>
+            <a:r>
+              <a:rPr lang="en-CN" sz="1800" b="1" dirty="0">
+                <a:solidFill>
+                  <a:schemeClr val="bg2"/>
+                </a:solidFill>
+                <a:latin typeface="+mn-ea"/>
+                <a:ea typeface="+mn-ea"/>
+              </a:rPr>
+              <a:t>章</a:t>
+            </a:r>
+          </a:p>
+        </p:txBody>
+      </p:sp>
+    </p:spTree>
+    <p:extLst>
+      <p:ext uri="{BB962C8B-B14F-4D97-AF65-F5344CB8AC3E}">
+        <p14:creationId xmlns:p14="http://schemas.microsoft.com/office/powerpoint/2010/main" val="1658607177"/>
+      </p:ext>
+    </p:extLst>
+  </p:cSld>
+  <p:clrMapOvr>
+    <a:masterClrMapping/>
+  </p:clrMapOvr>
+  <p:transition>
+    <p:fade/>
+  </p:transition>
+</p:sld>
+</file>
+
+<file path=ppt/slides/slide11.xml><?xml version="1.0" encoding="utf-8"?>
+<p:sld xmlns:a="http://schemas.openxmlformats.org/drawingml/2006/main" xmlns:r="http://schemas.openxmlformats.org/officeDocument/2006/relationships" xmlns:p="http://schemas.openxmlformats.org/presentationml/2006/main" showMasterSp="0">
+  <p:cSld>
     <p:spTree>
       <p:nvGrpSpPr>
         <p:cNvPr id="1" name=""/>
@@ -13551,7 +14285,7 @@
 </p:sld>
 </file>
 
-<file path=ppt/slides/slide11.xml><?xml version="1.0" encoding="utf-8"?>
+<file path=ppt/slides/slide12.xml><?xml version="1.0" encoding="utf-8"?>
 <p:sld xmlns:a="http://schemas.openxmlformats.org/drawingml/2006/main" xmlns:r="http://schemas.openxmlformats.org/officeDocument/2006/relationships" xmlns:p="http://schemas.openxmlformats.org/presentationml/2006/main">
   <p:cSld>
     <p:spTree>
@@ -13699,7 +14433,7 @@
 </p:sld>
 </file>
 
-<file path=ppt/slides/slide12.xml><?xml version="1.0" encoding="utf-8"?>
+<file path=ppt/slides/slide13.xml><?xml version="1.0" encoding="utf-8"?>
 <p:sld xmlns:a="http://schemas.openxmlformats.org/drawingml/2006/main" xmlns:r="http://schemas.openxmlformats.org/officeDocument/2006/relationships" xmlns:p="http://schemas.openxmlformats.org/presentationml/2006/main">
   <p:cSld>
     <p:spTree>
@@ -13933,7 +14667,7 @@
 </p:sld>
 </file>
 
-<file path=ppt/slides/slide13.xml><?xml version="1.0" encoding="utf-8"?>
+<file path=ppt/slides/slide14.xml><?xml version="1.0" encoding="utf-8"?>
 <p:sld xmlns:a="http://schemas.openxmlformats.org/drawingml/2006/main" xmlns:r="http://schemas.openxmlformats.org/officeDocument/2006/relationships" xmlns:p="http://schemas.openxmlformats.org/presentationml/2006/main">
   <p:cSld>
     <p:spTree>
@@ -14319,7 +15053,7 @@
 </p:sld>
 </file>
 
-<file path=ppt/slides/slide14.xml><?xml version="1.0" encoding="utf-8"?>
+<file path=ppt/slides/slide15.xml><?xml version="1.0" encoding="utf-8"?>
 <p:sld xmlns:a="http://schemas.openxmlformats.org/drawingml/2006/main" xmlns:r="http://schemas.openxmlformats.org/officeDocument/2006/relationships" xmlns:p="http://schemas.openxmlformats.org/presentationml/2006/main">
   <p:cSld>
     <p:spTree>
@@ -14601,7 +15335,7 @@
 </p:sld>
 </file>
 
-<file path=ppt/slides/slide15.xml><?xml version="1.0" encoding="utf-8"?>
+<file path=ppt/slides/slide16.xml><?xml version="1.0" encoding="utf-8"?>
 <p:sld xmlns:a="http://schemas.openxmlformats.org/drawingml/2006/main" xmlns:r="http://schemas.openxmlformats.org/officeDocument/2006/relationships" xmlns:p="http://schemas.openxmlformats.org/presentationml/2006/main">
   <p:cSld>
     <p:spTree>
@@ -14918,7 +15652,7 @@
 </p:sld>
 </file>
 
-<file path=ppt/slides/slide16.xml><?xml version="1.0" encoding="utf-8"?>
+<file path=ppt/slides/slide17.xml><?xml version="1.0" encoding="utf-8"?>
 <p:sld xmlns:a="http://schemas.openxmlformats.org/drawingml/2006/main" xmlns:r="http://schemas.openxmlformats.org/officeDocument/2006/relationships" xmlns:p="http://schemas.openxmlformats.org/presentationml/2006/main">
   <p:cSld>
     <p:spTree>
@@ -15066,7 +15800,7 @@
 </p:sld>
 </file>
 
-<file path=ppt/slides/slide17.xml><?xml version="1.0" encoding="utf-8"?>
+<file path=ppt/slides/slide18.xml><?xml version="1.0" encoding="utf-8"?>
 <p:sld xmlns:a="http://schemas.openxmlformats.org/drawingml/2006/main" xmlns:r="http://schemas.openxmlformats.org/officeDocument/2006/relationships" xmlns:p="http://schemas.openxmlformats.org/presentationml/2006/main">
   <p:cSld>
     <p:spTree>
@@ -15324,7 +16058,7 @@
 </p:sld>
 </file>
 
-<file path=ppt/slides/slide18.xml><?xml version="1.0" encoding="utf-8"?>
+<file path=ppt/slides/slide19.xml><?xml version="1.0" encoding="utf-8"?>
 <p:sld xmlns:a="http://schemas.openxmlformats.org/drawingml/2006/main" xmlns:r="http://schemas.openxmlformats.org/officeDocument/2006/relationships" xmlns:p="http://schemas.openxmlformats.org/presentationml/2006/main">
   <p:cSld>
     <p:spTree>
@@ -15727,496 +16461,6 @@
     <p:extLst>
       <p:ext uri="{BB962C8B-B14F-4D97-AF65-F5344CB8AC3E}">
         <p14:creationId xmlns:p14="http://schemas.microsoft.com/office/powerpoint/2010/main" val="1157508697"/>
-      </p:ext>
-    </p:extLst>
-  </p:cSld>
-  <p:clrMapOvr>
-    <a:masterClrMapping/>
-  </p:clrMapOvr>
-  <p:transition>
-    <p:fade/>
-  </p:transition>
-</p:sld>
-</file>
-
-<file path=ppt/slides/slide19.xml><?xml version="1.0" encoding="utf-8"?>
-<p:sld xmlns:a="http://schemas.openxmlformats.org/drawingml/2006/main" xmlns:r="http://schemas.openxmlformats.org/officeDocument/2006/relationships" xmlns:p="http://schemas.openxmlformats.org/presentationml/2006/main">
-  <p:cSld>
-    <p:spTree>
-      <p:nvGrpSpPr>
-        <p:cNvPr id="1" name=""/>
-        <p:cNvGrpSpPr/>
-        <p:nvPr/>
-      </p:nvGrpSpPr>
-      <p:grpSpPr>
-        <a:xfrm>
-          <a:off x="0" y="0"/>
-          <a:ext cx="0" cy="0"/>
-          <a:chOff x="0" y="0"/>
-          <a:chExt cx="0" cy="0"/>
-        </a:xfrm>
-      </p:grpSpPr>
-      <p:sp>
-        <p:nvSpPr>
-          <p:cNvPr id="3" name="标题 2"/>
-          <p:cNvSpPr>
-            <a:spLocks noGrp="1"/>
-          </p:cNvSpPr>
-          <p:nvPr>
-            <p:ph type="title"/>
-          </p:nvPr>
-        </p:nvSpPr>
-        <p:spPr>
-          <a:xfrm>
-            <a:off x="1" y="8526"/>
-            <a:ext cx="10537372" cy="792162"/>
-          </a:xfrm>
-        </p:spPr>
-        <p:txBody>
-          <a:bodyPr/>
-          <a:lstStyle/>
-          <a:p>
-            <a:pPr fontAlgn="auto">
-              <a:spcBef>
-                <a:spcPts val="0"/>
-              </a:spcBef>
-              <a:spcAft>
-                <a:spcPts val="0"/>
-              </a:spcAft>
-            </a:pPr>
-            <a:r>
-              <a:rPr lang="zh-CN" altLang="en-US" dirty="0">
-                <a:latin typeface="微软雅黑" pitchFamily="34" charset="-122"/>
-                <a:ea typeface="微软雅黑" pitchFamily="34" charset="-122"/>
-              </a:rPr>
-              <a:t>二、空间数据类型</a:t>
-            </a:r>
-            <a:r>
-              <a:rPr lang="en-CN" dirty="0">
-                <a:latin typeface="微软雅黑" pitchFamily="34" charset="-122"/>
-                <a:ea typeface="微软雅黑" pitchFamily="34" charset="-122"/>
-              </a:rPr>
-              <a:t> </a:t>
-            </a:r>
-            <a:endParaRPr lang="zh-CN" altLang="en-US" dirty="0">
-              <a:latin typeface="微软雅黑" pitchFamily="34" charset="-122"/>
-              <a:ea typeface="微软雅黑" pitchFamily="34" charset="-122"/>
-            </a:endParaRPr>
-          </a:p>
-        </p:txBody>
-      </p:sp>
-      <p:sp>
-        <p:nvSpPr>
-          <p:cNvPr id="2" name="TextBox 1">
-            <a:extLst>
-              <a:ext uri="{FF2B5EF4-FFF2-40B4-BE49-F238E27FC236}">
-                <a16:creationId xmlns:a16="http://schemas.microsoft.com/office/drawing/2014/main" id="{631AADB6-C88A-D817-4683-FC087E4E240F}"/>
-              </a:ext>
-            </a:extLst>
-          </p:cNvPr>
-          <p:cNvSpPr txBox="1"/>
-          <p:nvPr/>
-        </p:nvSpPr>
-        <p:spPr>
-          <a:xfrm>
-            <a:off x="268514" y="846749"/>
-            <a:ext cx="10081821" cy="662489"/>
-          </a:xfrm>
-          <a:prstGeom prst="rect">
-            <a:avLst/>
-          </a:prstGeom>
-          <a:noFill/>
-        </p:spPr>
-        <p:txBody>
-          <a:bodyPr wrap="square" rtlCol="0">
-            <a:spAutoFit/>
-          </a:bodyPr>
-          <a:lstStyle/>
-          <a:p>
-            <a:pPr algn="just">
-              <a:lnSpc>
-                <a:spcPct val="150000"/>
-              </a:lnSpc>
-            </a:pPr>
-            <a:r>
-              <a:rPr lang="zh-CN" altLang="en-CN" sz="2800" b="1" dirty="0">
-                <a:solidFill>
-                  <a:srgbClr val="333333"/>
-                </a:solidFill>
-                <a:latin typeface="+mn-ea"/>
-                <a:ea typeface="+mn-ea"/>
-              </a:rPr>
-              <a:t>矢量</a:t>
-            </a:r>
-            <a:r>
-              <a:rPr lang="zh-CN" altLang="en-US" sz="2800" b="1" dirty="0">
-                <a:solidFill>
-                  <a:srgbClr val="333333"/>
-                </a:solidFill>
-                <a:latin typeface="+mn-ea"/>
-                <a:ea typeface="+mn-ea"/>
-              </a:rPr>
-              <a:t>数据概念</a:t>
-            </a:r>
-            <a:endParaRPr lang="en-US" altLang="zh-CN" sz="2800" b="1" dirty="0">
-              <a:solidFill>
-                <a:srgbClr val="333333"/>
-              </a:solidFill>
-              <a:latin typeface="+mn-ea"/>
-              <a:ea typeface="+mn-ea"/>
-            </a:endParaRPr>
-          </a:p>
-        </p:txBody>
-      </p:sp>
-      <p:sp>
-        <p:nvSpPr>
-          <p:cNvPr id="5" name="TextBox 4">
-            <a:extLst>
-              <a:ext uri="{FF2B5EF4-FFF2-40B4-BE49-F238E27FC236}">
-                <a16:creationId xmlns:a16="http://schemas.microsoft.com/office/drawing/2014/main" id="{78502774-B04C-634F-1396-E5815996BC36}"/>
-              </a:ext>
-            </a:extLst>
-          </p:cNvPr>
-          <p:cNvSpPr txBox="1"/>
-          <p:nvPr/>
-        </p:nvSpPr>
-        <p:spPr>
-          <a:xfrm>
-            <a:off x="486229" y="1707699"/>
-            <a:ext cx="11466285" cy="4755982"/>
-          </a:xfrm>
-          <a:prstGeom prst="rect">
-            <a:avLst/>
-          </a:prstGeom>
-          <a:noFill/>
-        </p:spPr>
-        <p:txBody>
-          <a:bodyPr wrap="square">
-            <a:spAutoFit/>
-          </a:bodyPr>
-          <a:lstStyle/>
-          <a:p>
-            <a:pPr algn="l">
-              <a:lnSpc>
-                <a:spcPct val="150000"/>
-              </a:lnSpc>
-            </a:pPr>
-            <a:r>
-              <a:rPr lang="zh-CN" altLang="en-US" sz="2800" dirty="0">
-                <a:solidFill>
-                  <a:srgbClr val="121212"/>
-                </a:solidFill>
-                <a:latin typeface="+mn-ea"/>
-                <a:ea typeface="+mn-ea"/>
-              </a:rPr>
-              <a:t>矢量数据三要素：</a:t>
-            </a:r>
-            <a:r>
-              <a:rPr lang="zh-CN" altLang="en-US" sz="2800" b="1" dirty="0">
-                <a:solidFill>
-                  <a:srgbClr val="121212"/>
-                </a:solidFill>
-                <a:latin typeface="+mn-ea"/>
-                <a:ea typeface="+mn-ea"/>
-              </a:rPr>
-              <a:t>点，线，面</a:t>
-            </a:r>
-            <a:r>
-              <a:rPr lang="zh-CN" altLang="en-US" sz="2800" dirty="0">
-                <a:solidFill>
-                  <a:srgbClr val="121212"/>
-                </a:solidFill>
-                <a:latin typeface="+mn-ea"/>
-                <a:ea typeface="+mn-ea"/>
-              </a:rPr>
-              <a:t>。</a:t>
-            </a:r>
-          </a:p>
-          <a:p>
-            <a:pPr algn="l">
-              <a:lnSpc>
-                <a:spcPct val="150000"/>
-              </a:lnSpc>
-            </a:pPr>
-            <a:r>
-              <a:rPr lang="zh-CN" altLang="en-US" sz="2800" dirty="0">
-                <a:solidFill>
-                  <a:srgbClr val="121212"/>
-                </a:solidFill>
-                <a:latin typeface="+mn-ea"/>
-                <a:ea typeface="+mn-ea"/>
-              </a:rPr>
-              <a:t>矢量数据的主要内容：</a:t>
-            </a:r>
-            <a:r>
-              <a:rPr lang="zh-CN" altLang="en-US" sz="2800" b="1" dirty="0">
-                <a:solidFill>
-                  <a:srgbClr val="121212"/>
-                </a:solidFill>
-                <a:latin typeface="+mn-ea"/>
-                <a:ea typeface="+mn-ea"/>
-              </a:rPr>
-              <a:t>几何对象</a:t>
-            </a:r>
-            <a:r>
-              <a:rPr lang="en-US" altLang="zh-CN" sz="2800" b="1" dirty="0">
-                <a:solidFill>
-                  <a:srgbClr val="121212"/>
-                </a:solidFill>
-                <a:latin typeface="+mn-ea"/>
-                <a:ea typeface="+mn-ea"/>
-              </a:rPr>
-              <a:t>(</a:t>
-            </a:r>
-            <a:r>
-              <a:rPr lang="en-US" sz="2800" b="1" dirty="0">
-                <a:solidFill>
-                  <a:srgbClr val="121212"/>
-                </a:solidFill>
-                <a:latin typeface="+mn-ea"/>
-                <a:ea typeface="+mn-ea"/>
-              </a:rPr>
-              <a:t>Geometry)+</a:t>
-            </a:r>
-            <a:r>
-              <a:rPr lang="zh-CN" altLang="en-US" sz="2800" b="1" dirty="0">
-                <a:solidFill>
-                  <a:srgbClr val="121212"/>
-                </a:solidFill>
-                <a:latin typeface="+mn-ea"/>
-                <a:ea typeface="+mn-ea"/>
-              </a:rPr>
-              <a:t>属性</a:t>
-            </a:r>
-            <a:r>
-              <a:rPr lang="en-US" altLang="zh-CN" sz="2800" b="1" dirty="0">
-                <a:solidFill>
-                  <a:srgbClr val="121212"/>
-                </a:solidFill>
-                <a:latin typeface="+mn-ea"/>
-                <a:ea typeface="+mn-ea"/>
-              </a:rPr>
-              <a:t>(</a:t>
-            </a:r>
-            <a:r>
-              <a:rPr lang="en-US" sz="2800" b="1" dirty="0">
-                <a:solidFill>
-                  <a:srgbClr val="121212"/>
-                </a:solidFill>
-                <a:latin typeface="+mn-ea"/>
-                <a:ea typeface="+mn-ea"/>
-              </a:rPr>
-              <a:t>attribute)</a:t>
-            </a:r>
-            <a:r>
-              <a:rPr lang="zh-CN" altLang="en-US" sz="2800" dirty="0">
-                <a:solidFill>
-                  <a:srgbClr val="121212"/>
-                </a:solidFill>
-                <a:latin typeface="+mn-ea"/>
-                <a:ea typeface="+mn-ea"/>
-              </a:rPr>
-              <a:t>。</a:t>
-            </a:r>
-            <a:endParaRPr lang="en-US" sz="2800" dirty="0">
-              <a:solidFill>
-                <a:srgbClr val="121212"/>
-              </a:solidFill>
-              <a:latin typeface="+mn-ea"/>
-              <a:ea typeface="+mn-ea"/>
-            </a:endParaRPr>
-          </a:p>
-          <a:p>
-            <a:pPr algn="l">
-              <a:lnSpc>
-                <a:spcPct val="150000"/>
-              </a:lnSpc>
-            </a:pPr>
-            <a:r>
-              <a:rPr lang="zh-CN" altLang="en-US" sz="2800" dirty="0">
-                <a:solidFill>
-                  <a:srgbClr val="121212"/>
-                </a:solidFill>
-                <a:latin typeface="+mn-ea"/>
-                <a:ea typeface="+mn-ea"/>
-              </a:rPr>
-              <a:t>矢量数据的表示与比例尺相关：</a:t>
-            </a:r>
-            <a:r>
-              <a:rPr lang="zh-CN" altLang="en-US" sz="2800" b="1" dirty="0">
-                <a:solidFill>
-                  <a:srgbClr val="121212"/>
-                </a:solidFill>
-                <a:latin typeface="+mn-ea"/>
-                <a:ea typeface="+mn-ea"/>
-              </a:rPr>
-              <a:t>比例尺越大，分辨率越高，内容越详细</a:t>
-            </a:r>
-            <a:r>
-              <a:rPr lang="zh-CN" altLang="en-US" sz="2800" dirty="0">
-                <a:solidFill>
-                  <a:srgbClr val="121212"/>
-                </a:solidFill>
-                <a:latin typeface="+mn-ea"/>
-                <a:ea typeface="+mn-ea"/>
-              </a:rPr>
-              <a:t>；</a:t>
-            </a:r>
-            <a:endParaRPr lang="en-US" altLang="zh-CN" sz="2800" dirty="0">
-              <a:solidFill>
-                <a:srgbClr val="121212"/>
-              </a:solidFill>
-              <a:latin typeface="+mn-ea"/>
-              <a:ea typeface="+mn-ea"/>
-            </a:endParaRPr>
-          </a:p>
-          <a:p>
-            <a:pPr algn="l">
-              <a:lnSpc>
-                <a:spcPct val="150000"/>
-              </a:lnSpc>
-            </a:pPr>
-            <a:r>
-              <a:rPr lang="zh-CN" altLang="en-US" sz="2800" dirty="0">
-                <a:solidFill>
-                  <a:srgbClr val="121212"/>
-                </a:solidFill>
-                <a:latin typeface="+mn-ea"/>
-                <a:ea typeface="+mn-ea"/>
-              </a:rPr>
-              <a:t>矢量数据主要用于</a:t>
-            </a:r>
-            <a:r>
-              <a:rPr lang="zh-CN" altLang="en-US" sz="2800" b="1" dirty="0">
-                <a:solidFill>
-                  <a:srgbClr val="121212"/>
-                </a:solidFill>
-                <a:latin typeface="+mn-ea"/>
-                <a:ea typeface="+mn-ea"/>
-              </a:rPr>
-              <a:t>空间分析和制图</a:t>
-            </a:r>
-            <a:r>
-              <a:rPr lang="zh-CN" altLang="en-US" sz="2800" dirty="0">
-                <a:solidFill>
-                  <a:srgbClr val="121212"/>
-                </a:solidFill>
-                <a:latin typeface="+mn-ea"/>
-                <a:ea typeface="+mn-ea"/>
-              </a:rPr>
-              <a:t>。</a:t>
-            </a:r>
-            <a:endParaRPr lang="en-US" altLang="zh-CN" sz="2800" dirty="0">
-              <a:solidFill>
-                <a:srgbClr val="121212"/>
-              </a:solidFill>
-              <a:latin typeface="+mn-ea"/>
-              <a:ea typeface="+mn-ea"/>
-            </a:endParaRPr>
-          </a:p>
-          <a:p>
-            <a:pPr algn="l">
-              <a:lnSpc>
-                <a:spcPct val="150000"/>
-              </a:lnSpc>
-            </a:pPr>
-            <a:r>
-              <a:rPr lang="zh-CN" altLang="en-US" sz="2800" dirty="0">
-                <a:solidFill>
-                  <a:srgbClr val="121212"/>
-                </a:solidFill>
-                <a:latin typeface="+mn-ea"/>
-                <a:ea typeface="+mn-ea"/>
-              </a:rPr>
-              <a:t>矢量数据常用的存储格式：</a:t>
-            </a:r>
-            <a:r>
-              <a:rPr lang="en-US" altLang="zh-CN" sz="2800" b="1" dirty="0">
-                <a:solidFill>
-                  <a:srgbClr val="121212"/>
-                </a:solidFill>
-                <a:latin typeface="+mn-ea"/>
-                <a:ea typeface="+mn-ea"/>
-              </a:rPr>
-              <a:t>S</a:t>
-            </a:r>
-            <a:r>
-              <a:rPr lang="en-US" sz="2800" b="1" dirty="0">
-                <a:solidFill>
-                  <a:srgbClr val="121212"/>
-                </a:solidFill>
-                <a:latin typeface="+mn-ea"/>
-                <a:ea typeface="+mn-ea"/>
-              </a:rPr>
-              <a:t>hapefile</a:t>
-            </a:r>
-            <a:r>
-              <a:rPr lang="zh-CN" altLang="en-US" sz="2800" b="1" dirty="0">
-                <a:solidFill>
-                  <a:srgbClr val="121212"/>
-                </a:solidFill>
-                <a:latin typeface="+mn-ea"/>
-                <a:ea typeface="+mn-ea"/>
-              </a:rPr>
-              <a:t>格式，</a:t>
-            </a:r>
-            <a:r>
-              <a:rPr lang="en-US" altLang="zh-CN" sz="2800" b="1" dirty="0" err="1">
-                <a:solidFill>
-                  <a:srgbClr val="121212"/>
-                </a:solidFill>
-                <a:latin typeface="+mn-ea"/>
-                <a:ea typeface="+mn-ea"/>
-              </a:rPr>
-              <a:t>GeoPackage</a:t>
-            </a:r>
-            <a:r>
-              <a:rPr lang="zh-CN" altLang="en-US" sz="2800" b="1" dirty="0">
-                <a:solidFill>
-                  <a:srgbClr val="121212"/>
-                </a:solidFill>
-                <a:latin typeface="+mn-ea"/>
-                <a:ea typeface="+mn-ea"/>
-              </a:rPr>
-              <a:t>格式、</a:t>
-            </a:r>
-            <a:r>
-              <a:rPr lang="en-US" altLang="zh-CN" sz="2800" b="1" dirty="0">
-                <a:solidFill>
-                  <a:srgbClr val="121212"/>
-                </a:solidFill>
-                <a:latin typeface="+mn-ea"/>
-                <a:ea typeface="+mn-ea"/>
-              </a:rPr>
-              <a:t>KML</a:t>
-            </a:r>
-            <a:r>
-              <a:rPr lang="zh-CN" altLang="en-US" sz="2800" b="1" dirty="0">
-                <a:solidFill>
-                  <a:srgbClr val="121212"/>
-                </a:solidFill>
-                <a:latin typeface="+mn-ea"/>
-                <a:ea typeface="+mn-ea"/>
-              </a:rPr>
-              <a:t>格式</a:t>
-            </a:r>
-            <a:r>
-              <a:rPr lang="zh-CN" altLang="en-US" sz="2800" dirty="0">
-                <a:solidFill>
-                  <a:srgbClr val="121212"/>
-                </a:solidFill>
-                <a:latin typeface="+mn-ea"/>
-                <a:ea typeface="+mn-ea"/>
-              </a:rPr>
-              <a:t>等。</a:t>
-            </a:r>
-          </a:p>
-        </p:txBody>
-      </p:sp>
-    </p:spTree>
-    <p:extLst>
-      <p:ext uri="{BB962C8B-B14F-4D97-AF65-F5344CB8AC3E}">
-        <p14:creationId xmlns:p14="http://schemas.microsoft.com/office/powerpoint/2010/main" val="2097263393"/>
       </p:ext>
     </p:extLst>
   </p:cSld>
@@ -16685,6 +16929,496 @@
           <a:bodyPr/>
           <a:lstStyle/>
           <a:p>
+            <a:pPr fontAlgn="auto">
+              <a:spcBef>
+                <a:spcPts val="0"/>
+              </a:spcBef>
+              <a:spcAft>
+                <a:spcPts val="0"/>
+              </a:spcAft>
+            </a:pPr>
+            <a:r>
+              <a:rPr lang="zh-CN" altLang="en-US" dirty="0">
+                <a:latin typeface="微软雅黑" pitchFamily="34" charset="-122"/>
+                <a:ea typeface="微软雅黑" pitchFamily="34" charset="-122"/>
+              </a:rPr>
+              <a:t>二、空间数据类型</a:t>
+            </a:r>
+            <a:r>
+              <a:rPr lang="en-CN" dirty="0">
+                <a:latin typeface="微软雅黑" pitchFamily="34" charset="-122"/>
+                <a:ea typeface="微软雅黑" pitchFamily="34" charset="-122"/>
+              </a:rPr>
+              <a:t> </a:t>
+            </a:r>
+            <a:endParaRPr lang="zh-CN" altLang="en-US" dirty="0">
+              <a:latin typeface="微软雅黑" pitchFamily="34" charset="-122"/>
+              <a:ea typeface="微软雅黑" pitchFamily="34" charset="-122"/>
+            </a:endParaRPr>
+          </a:p>
+        </p:txBody>
+      </p:sp>
+      <p:sp>
+        <p:nvSpPr>
+          <p:cNvPr id="2" name="TextBox 1">
+            <a:extLst>
+              <a:ext uri="{FF2B5EF4-FFF2-40B4-BE49-F238E27FC236}">
+                <a16:creationId xmlns:a16="http://schemas.microsoft.com/office/drawing/2014/main" id="{631AADB6-C88A-D817-4683-FC087E4E240F}"/>
+              </a:ext>
+            </a:extLst>
+          </p:cNvPr>
+          <p:cNvSpPr txBox="1"/>
+          <p:nvPr/>
+        </p:nvSpPr>
+        <p:spPr>
+          <a:xfrm>
+            <a:off x="268514" y="846749"/>
+            <a:ext cx="10081821" cy="662489"/>
+          </a:xfrm>
+          <a:prstGeom prst="rect">
+            <a:avLst/>
+          </a:prstGeom>
+          <a:noFill/>
+        </p:spPr>
+        <p:txBody>
+          <a:bodyPr wrap="square" rtlCol="0">
+            <a:spAutoFit/>
+          </a:bodyPr>
+          <a:lstStyle/>
+          <a:p>
+            <a:pPr algn="just">
+              <a:lnSpc>
+                <a:spcPct val="150000"/>
+              </a:lnSpc>
+            </a:pPr>
+            <a:r>
+              <a:rPr lang="zh-CN" altLang="en-CN" sz="2800" b="1" dirty="0">
+                <a:solidFill>
+                  <a:srgbClr val="333333"/>
+                </a:solidFill>
+                <a:latin typeface="+mn-ea"/>
+                <a:ea typeface="+mn-ea"/>
+              </a:rPr>
+              <a:t>矢量</a:t>
+            </a:r>
+            <a:r>
+              <a:rPr lang="zh-CN" altLang="en-US" sz="2800" b="1" dirty="0">
+                <a:solidFill>
+                  <a:srgbClr val="333333"/>
+                </a:solidFill>
+                <a:latin typeface="+mn-ea"/>
+                <a:ea typeface="+mn-ea"/>
+              </a:rPr>
+              <a:t>数据概念</a:t>
+            </a:r>
+            <a:endParaRPr lang="en-US" altLang="zh-CN" sz="2800" b="1" dirty="0">
+              <a:solidFill>
+                <a:srgbClr val="333333"/>
+              </a:solidFill>
+              <a:latin typeface="+mn-ea"/>
+              <a:ea typeface="+mn-ea"/>
+            </a:endParaRPr>
+          </a:p>
+        </p:txBody>
+      </p:sp>
+      <p:sp>
+        <p:nvSpPr>
+          <p:cNvPr id="5" name="TextBox 4">
+            <a:extLst>
+              <a:ext uri="{FF2B5EF4-FFF2-40B4-BE49-F238E27FC236}">
+                <a16:creationId xmlns:a16="http://schemas.microsoft.com/office/drawing/2014/main" id="{78502774-B04C-634F-1396-E5815996BC36}"/>
+              </a:ext>
+            </a:extLst>
+          </p:cNvPr>
+          <p:cNvSpPr txBox="1"/>
+          <p:nvPr/>
+        </p:nvSpPr>
+        <p:spPr>
+          <a:xfrm>
+            <a:off x="486229" y="1707699"/>
+            <a:ext cx="11466285" cy="4755982"/>
+          </a:xfrm>
+          <a:prstGeom prst="rect">
+            <a:avLst/>
+          </a:prstGeom>
+          <a:noFill/>
+        </p:spPr>
+        <p:txBody>
+          <a:bodyPr wrap="square">
+            <a:spAutoFit/>
+          </a:bodyPr>
+          <a:lstStyle/>
+          <a:p>
+            <a:pPr algn="l">
+              <a:lnSpc>
+                <a:spcPct val="150000"/>
+              </a:lnSpc>
+            </a:pPr>
+            <a:r>
+              <a:rPr lang="zh-CN" altLang="en-US" sz="2800" dirty="0">
+                <a:solidFill>
+                  <a:srgbClr val="121212"/>
+                </a:solidFill>
+                <a:latin typeface="+mn-ea"/>
+                <a:ea typeface="+mn-ea"/>
+              </a:rPr>
+              <a:t>矢量数据三要素：</a:t>
+            </a:r>
+            <a:r>
+              <a:rPr lang="zh-CN" altLang="en-US" sz="2800" b="1" dirty="0">
+                <a:solidFill>
+                  <a:srgbClr val="121212"/>
+                </a:solidFill>
+                <a:latin typeface="+mn-ea"/>
+                <a:ea typeface="+mn-ea"/>
+              </a:rPr>
+              <a:t>点，线，面</a:t>
+            </a:r>
+            <a:r>
+              <a:rPr lang="zh-CN" altLang="en-US" sz="2800" dirty="0">
+                <a:solidFill>
+                  <a:srgbClr val="121212"/>
+                </a:solidFill>
+                <a:latin typeface="+mn-ea"/>
+                <a:ea typeface="+mn-ea"/>
+              </a:rPr>
+              <a:t>。</a:t>
+            </a:r>
+          </a:p>
+          <a:p>
+            <a:pPr algn="l">
+              <a:lnSpc>
+                <a:spcPct val="150000"/>
+              </a:lnSpc>
+            </a:pPr>
+            <a:r>
+              <a:rPr lang="zh-CN" altLang="en-US" sz="2800" dirty="0">
+                <a:solidFill>
+                  <a:srgbClr val="121212"/>
+                </a:solidFill>
+                <a:latin typeface="+mn-ea"/>
+                <a:ea typeface="+mn-ea"/>
+              </a:rPr>
+              <a:t>矢量数据的主要内容：</a:t>
+            </a:r>
+            <a:r>
+              <a:rPr lang="zh-CN" altLang="en-US" sz="2800" b="1" dirty="0">
+                <a:solidFill>
+                  <a:srgbClr val="121212"/>
+                </a:solidFill>
+                <a:latin typeface="+mn-ea"/>
+                <a:ea typeface="+mn-ea"/>
+              </a:rPr>
+              <a:t>几何对象</a:t>
+            </a:r>
+            <a:r>
+              <a:rPr lang="en-US" altLang="zh-CN" sz="2800" b="1" dirty="0">
+                <a:solidFill>
+                  <a:srgbClr val="121212"/>
+                </a:solidFill>
+                <a:latin typeface="+mn-ea"/>
+                <a:ea typeface="+mn-ea"/>
+              </a:rPr>
+              <a:t>(</a:t>
+            </a:r>
+            <a:r>
+              <a:rPr lang="en-US" sz="2800" b="1" dirty="0">
+                <a:solidFill>
+                  <a:srgbClr val="121212"/>
+                </a:solidFill>
+                <a:latin typeface="+mn-ea"/>
+                <a:ea typeface="+mn-ea"/>
+              </a:rPr>
+              <a:t>Geometry)+</a:t>
+            </a:r>
+            <a:r>
+              <a:rPr lang="zh-CN" altLang="en-US" sz="2800" b="1" dirty="0">
+                <a:solidFill>
+                  <a:srgbClr val="121212"/>
+                </a:solidFill>
+                <a:latin typeface="+mn-ea"/>
+                <a:ea typeface="+mn-ea"/>
+              </a:rPr>
+              <a:t>属性</a:t>
+            </a:r>
+            <a:r>
+              <a:rPr lang="en-US" altLang="zh-CN" sz="2800" b="1" dirty="0">
+                <a:solidFill>
+                  <a:srgbClr val="121212"/>
+                </a:solidFill>
+                <a:latin typeface="+mn-ea"/>
+                <a:ea typeface="+mn-ea"/>
+              </a:rPr>
+              <a:t>(</a:t>
+            </a:r>
+            <a:r>
+              <a:rPr lang="en-US" sz="2800" b="1" dirty="0">
+                <a:solidFill>
+                  <a:srgbClr val="121212"/>
+                </a:solidFill>
+                <a:latin typeface="+mn-ea"/>
+                <a:ea typeface="+mn-ea"/>
+              </a:rPr>
+              <a:t>attribute)</a:t>
+            </a:r>
+            <a:r>
+              <a:rPr lang="zh-CN" altLang="en-US" sz="2800" dirty="0">
+                <a:solidFill>
+                  <a:srgbClr val="121212"/>
+                </a:solidFill>
+                <a:latin typeface="+mn-ea"/>
+                <a:ea typeface="+mn-ea"/>
+              </a:rPr>
+              <a:t>。</a:t>
+            </a:r>
+            <a:endParaRPr lang="en-US" sz="2800" dirty="0">
+              <a:solidFill>
+                <a:srgbClr val="121212"/>
+              </a:solidFill>
+              <a:latin typeface="+mn-ea"/>
+              <a:ea typeface="+mn-ea"/>
+            </a:endParaRPr>
+          </a:p>
+          <a:p>
+            <a:pPr algn="l">
+              <a:lnSpc>
+                <a:spcPct val="150000"/>
+              </a:lnSpc>
+            </a:pPr>
+            <a:r>
+              <a:rPr lang="zh-CN" altLang="en-US" sz="2800" dirty="0">
+                <a:solidFill>
+                  <a:srgbClr val="121212"/>
+                </a:solidFill>
+                <a:latin typeface="+mn-ea"/>
+                <a:ea typeface="+mn-ea"/>
+              </a:rPr>
+              <a:t>矢量数据的表示与比例尺相关：</a:t>
+            </a:r>
+            <a:r>
+              <a:rPr lang="zh-CN" altLang="en-US" sz="2800" b="1" dirty="0">
+                <a:solidFill>
+                  <a:srgbClr val="121212"/>
+                </a:solidFill>
+                <a:latin typeface="+mn-ea"/>
+                <a:ea typeface="+mn-ea"/>
+              </a:rPr>
+              <a:t>比例尺越大，分辨率越高，内容越详细</a:t>
+            </a:r>
+            <a:r>
+              <a:rPr lang="zh-CN" altLang="en-US" sz="2800" dirty="0">
+                <a:solidFill>
+                  <a:srgbClr val="121212"/>
+                </a:solidFill>
+                <a:latin typeface="+mn-ea"/>
+                <a:ea typeface="+mn-ea"/>
+              </a:rPr>
+              <a:t>；</a:t>
+            </a:r>
+            <a:endParaRPr lang="en-US" altLang="zh-CN" sz="2800" dirty="0">
+              <a:solidFill>
+                <a:srgbClr val="121212"/>
+              </a:solidFill>
+              <a:latin typeface="+mn-ea"/>
+              <a:ea typeface="+mn-ea"/>
+            </a:endParaRPr>
+          </a:p>
+          <a:p>
+            <a:pPr algn="l">
+              <a:lnSpc>
+                <a:spcPct val="150000"/>
+              </a:lnSpc>
+            </a:pPr>
+            <a:r>
+              <a:rPr lang="zh-CN" altLang="en-US" sz="2800" dirty="0">
+                <a:solidFill>
+                  <a:srgbClr val="121212"/>
+                </a:solidFill>
+                <a:latin typeface="+mn-ea"/>
+                <a:ea typeface="+mn-ea"/>
+              </a:rPr>
+              <a:t>矢量数据主要用于</a:t>
+            </a:r>
+            <a:r>
+              <a:rPr lang="zh-CN" altLang="en-US" sz="2800" b="1" dirty="0">
+                <a:solidFill>
+                  <a:srgbClr val="121212"/>
+                </a:solidFill>
+                <a:latin typeface="+mn-ea"/>
+                <a:ea typeface="+mn-ea"/>
+              </a:rPr>
+              <a:t>空间分析和制图</a:t>
+            </a:r>
+            <a:r>
+              <a:rPr lang="zh-CN" altLang="en-US" sz="2800" dirty="0">
+                <a:solidFill>
+                  <a:srgbClr val="121212"/>
+                </a:solidFill>
+                <a:latin typeface="+mn-ea"/>
+                <a:ea typeface="+mn-ea"/>
+              </a:rPr>
+              <a:t>。</a:t>
+            </a:r>
+            <a:endParaRPr lang="en-US" altLang="zh-CN" sz="2800" dirty="0">
+              <a:solidFill>
+                <a:srgbClr val="121212"/>
+              </a:solidFill>
+              <a:latin typeface="+mn-ea"/>
+              <a:ea typeface="+mn-ea"/>
+            </a:endParaRPr>
+          </a:p>
+          <a:p>
+            <a:pPr algn="l">
+              <a:lnSpc>
+                <a:spcPct val="150000"/>
+              </a:lnSpc>
+            </a:pPr>
+            <a:r>
+              <a:rPr lang="zh-CN" altLang="en-US" sz="2800" dirty="0">
+                <a:solidFill>
+                  <a:srgbClr val="121212"/>
+                </a:solidFill>
+                <a:latin typeface="+mn-ea"/>
+                <a:ea typeface="+mn-ea"/>
+              </a:rPr>
+              <a:t>矢量数据常用的存储格式：</a:t>
+            </a:r>
+            <a:r>
+              <a:rPr lang="en-US" altLang="zh-CN" sz="2800" b="1" dirty="0">
+                <a:solidFill>
+                  <a:srgbClr val="121212"/>
+                </a:solidFill>
+                <a:latin typeface="+mn-ea"/>
+                <a:ea typeface="+mn-ea"/>
+              </a:rPr>
+              <a:t>S</a:t>
+            </a:r>
+            <a:r>
+              <a:rPr lang="en-US" sz="2800" b="1" dirty="0">
+                <a:solidFill>
+                  <a:srgbClr val="121212"/>
+                </a:solidFill>
+                <a:latin typeface="+mn-ea"/>
+                <a:ea typeface="+mn-ea"/>
+              </a:rPr>
+              <a:t>hapefile</a:t>
+            </a:r>
+            <a:r>
+              <a:rPr lang="zh-CN" altLang="en-US" sz="2800" b="1" dirty="0">
+                <a:solidFill>
+                  <a:srgbClr val="121212"/>
+                </a:solidFill>
+                <a:latin typeface="+mn-ea"/>
+                <a:ea typeface="+mn-ea"/>
+              </a:rPr>
+              <a:t>格式，</a:t>
+            </a:r>
+            <a:r>
+              <a:rPr lang="en-US" altLang="zh-CN" sz="2800" b="1" dirty="0" err="1">
+                <a:solidFill>
+                  <a:srgbClr val="121212"/>
+                </a:solidFill>
+                <a:latin typeface="+mn-ea"/>
+                <a:ea typeface="+mn-ea"/>
+              </a:rPr>
+              <a:t>GeoPackage</a:t>
+            </a:r>
+            <a:r>
+              <a:rPr lang="zh-CN" altLang="en-US" sz="2800" b="1" dirty="0">
+                <a:solidFill>
+                  <a:srgbClr val="121212"/>
+                </a:solidFill>
+                <a:latin typeface="+mn-ea"/>
+                <a:ea typeface="+mn-ea"/>
+              </a:rPr>
+              <a:t>格式、</a:t>
+            </a:r>
+            <a:r>
+              <a:rPr lang="en-US" altLang="zh-CN" sz="2800" b="1" dirty="0">
+                <a:solidFill>
+                  <a:srgbClr val="121212"/>
+                </a:solidFill>
+                <a:latin typeface="+mn-ea"/>
+                <a:ea typeface="+mn-ea"/>
+              </a:rPr>
+              <a:t>KML</a:t>
+            </a:r>
+            <a:r>
+              <a:rPr lang="zh-CN" altLang="en-US" sz="2800" b="1" dirty="0">
+                <a:solidFill>
+                  <a:srgbClr val="121212"/>
+                </a:solidFill>
+                <a:latin typeface="+mn-ea"/>
+                <a:ea typeface="+mn-ea"/>
+              </a:rPr>
+              <a:t>格式</a:t>
+            </a:r>
+            <a:r>
+              <a:rPr lang="zh-CN" altLang="en-US" sz="2800" dirty="0">
+                <a:solidFill>
+                  <a:srgbClr val="121212"/>
+                </a:solidFill>
+                <a:latin typeface="+mn-ea"/>
+                <a:ea typeface="+mn-ea"/>
+              </a:rPr>
+              <a:t>等。</a:t>
+            </a:r>
+          </a:p>
+        </p:txBody>
+      </p:sp>
+    </p:spTree>
+    <p:extLst>
+      <p:ext uri="{BB962C8B-B14F-4D97-AF65-F5344CB8AC3E}">
+        <p14:creationId xmlns:p14="http://schemas.microsoft.com/office/powerpoint/2010/main" val="2097263393"/>
+      </p:ext>
+    </p:extLst>
+  </p:cSld>
+  <p:clrMapOvr>
+    <a:masterClrMapping/>
+  </p:clrMapOvr>
+  <p:transition>
+    <p:fade/>
+  </p:transition>
+</p:sld>
+</file>
+
+<file path=ppt/slides/slide21.xml><?xml version="1.0" encoding="utf-8"?>
+<p:sld xmlns:a="http://schemas.openxmlformats.org/drawingml/2006/main" xmlns:r="http://schemas.openxmlformats.org/officeDocument/2006/relationships" xmlns:p="http://schemas.openxmlformats.org/presentationml/2006/main">
+  <p:cSld>
+    <p:spTree>
+      <p:nvGrpSpPr>
+        <p:cNvPr id="1" name=""/>
+        <p:cNvGrpSpPr/>
+        <p:nvPr/>
+      </p:nvGrpSpPr>
+      <p:grpSpPr>
+        <a:xfrm>
+          <a:off x="0" y="0"/>
+          <a:ext cx="0" cy="0"/>
+          <a:chOff x="0" y="0"/>
+          <a:chExt cx="0" cy="0"/>
+        </a:xfrm>
+      </p:grpSpPr>
+      <p:sp>
+        <p:nvSpPr>
+          <p:cNvPr id="3" name="标题 2"/>
+          <p:cNvSpPr>
+            <a:spLocks noGrp="1"/>
+          </p:cNvSpPr>
+          <p:nvPr>
+            <p:ph type="title"/>
+          </p:nvPr>
+        </p:nvSpPr>
+        <p:spPr>
+          <a:xfrm>
+            <a:off x="1" y="8526"/>
+            <a:ext cx="10537372" cy="792162"/>
+          </a:xfrm>
+        </p:spPr>
+        <p:txBody>
+          <a:bodyPr/>
+          <a:lstStyle/>
+          <a:p>
             <a:r>
               <a:rPr lang="zh-CN" altLang="en-US" dirty="0">
                 <a:latin typeface="微软雅黑" pitchFamily="34" charset="-122"/>
@@ -16896,7 +17630,7 @@
 </p:sld>
 </file>
 
-<file path=ppt/slides/slide21.xml><?xml version="1.0" encoding="utf-8"?>
+<file path=ppt/slides/slide22.xml><?xml version="1.0" encoding="utf-8"?>
 <p:sld xmlns:a="http://schemas.openxmlformats.org/drawingml/2006/main" xmlns:r="http://schemas.openxmlformats.org/officeDocument/2006/relationships" xmlns:p="http://schemas.openxmlformats.org/presentationml/2006/main">
   <p:cSld>
     <p:spTree>
@@ -28201,7 +28935,7 @@
 </p:sld>
 </file>
 
-<file path=ppt/slides/slide22.xml><?xml version="1.0" encoding="utf-8"?>
+<file path=ppt/slides/slide23.xml><?xml version="1.0" encoding="utf-8"?>
 <p:sld xmlns:a="http://schemas.openxmlformats.org/drawingml/2006/main" xmlns:r="http://schemas.openxmlformats.org/officeDocument/2006/relationships" xmlns:p="http://schemas.openxmlformats.org/presentationml/2006/main">
   <p:cSld>
     <p:spTree>
@@ -28619,7 +29353,7 @@
 </p:sld>
 </file>
 
-<file path=ppt/slides/slide23.xml><?xml version="1.0" encoding="utf-8"?>
+<file path=ppt/slides/slide24.xml><?xml version="1.0" encoding="utf-8"?>
 <p:sld xmlns:a="http://schemas.openxmlformats.org/drawingml/2006/main" xmlns:r="http://schemas.openxmlformats.org/officeDocument/2006/relationships" xmlns:p="http://schemas.openxmlformats.org/presentationml/2006/main">
   <p:cSld>
     <p:spTree>
@@ -28867,7 +29601,7 @@
 </p:sld>
 </file>
 
-<file path=ppt/slides/slide24.xml><?xml version="1.0" encoding="utf-8"?>
+<file path=ppt/slides/slide25.xml><?xml version="1.0" encoding="utf-8"?>
 <p:sld xmlns:a="http://schemas.openxmlformats.org/drawingml/2006/main" xmlns:r="http://schemas.openxmlformats.org/officeDocument/2006/relationships" xmlns:p="http://schemas.openxmlformats.org/presentationml/2006/main">
   <p:cSld>
     <p:spTree>
@@ -28995,35 +29729,35 @@
           <p:nvPr>
             <p:extLst>
               <p:ext uri="{D42A27DB-BD31-4B8C-83A1-F6EECF244321}">
-                <p14:modId xmlns:p14="http://schemas.microsoft.com/office/powerpoint/2010/main" val="3205204402"/>
+                <p14:modId xmlns:p14="http://schemas.microsoft.com/office/powerpoint/2010/main" val="2583736206"/>
               </p:ext>
             </p:extLst>
           </p:nvPr>
         </p:nvGraphicFramePr>
         <p:xfrm>
           <a:off x="384629" y="1621403"/>
-          <a:ext cx="11524342" cy="4989358"/>
+          <a:ext cx="11385970" cy="4932819"/>
         </p:xfrm>
         <a:graphic>
           <a:graphicData uri="http://schemas.openxmlformats.org/drawingml/2006/table">
             <a:tbl>
               <a:tblPr/>
               <a:tblGrid>
-                <a:gridCol w="2822691">
+                <a:gridCol w="2788799">
                   <a:extLst>
                     <a:ext uri="{9D8B030D-6E8A-4147-A177-3AD203B41FA5}">
                       <a16:colId xmlns:a16="http://schemas.microsoft.com/office/drawing/2014/main" val="66372102"/>
                     </a:ext>
                   </a:extLst>
                 </a:gridCol>
-                <a:gridCol w="4171677">
+                <a:gridCol w="4121588">
                   <a:extLst>
                     <a:ext uri="{9D8B030D-6E8A-4147-A177-3AD203B41FA5}">
                       <a16:colId xmlns:a16="http://schemas.microsoft.com/office/drawing/2014/main" val="1217071533"/>
                     </a:ext>
                   </a:extLst>
                 </a:gridCol>
-                <a:gridCol w="4529974">
+                <a:gridCol w="4475583">
                   <a:extLst>
                     <a:ext uri="{9D8B030D-6E8A-4147-A177-3AD203B41FA5}">
                       <a16:colId xmlns:a16="http://schemas.microsoft.com/office/drawing/2014/main" val="763757787"/>
@@ -29031,7 +29765,7 @@
                   </a:extLst>
                 </a:gridCol>
               </a:tblGrid>
-              <a:tr h="421860">
+              <a:tr h="541303">
                 <a:tc>
                   <a:txBody>
                     <a:bodyPr/>
@@ -29215,7 +29949,7 @@
                   </a:ext>
                 </a:extLst>
               </a:tr>
-              <a:tr h="759348">
+              <a:tr h="974346">
                 <a:tc>
                   <a:txBody>
                     <a:bodyPr/>
@@ -29423,7 +30157,7 @@
                   </a:ext>
                 </a:extLst>
               </a:tr>
-              <a:tr h="620159">
+              <a:tr h="734239">
                 <a:tc>
                   <a:txBody>
                     <a:bodyPr/>
@@ -29631,7 +30365,7 @@
                   </a:ext>
                 </a:extLst>
               </a:tr>
-              <a:tr h="759348">
+              <a:tr h="974346">
                 <a:tc>
                   <a:txBody>
                     <a:bodyPr/>
@@ -29839,7 +30573,7 @@
                   </a:ext>
                 </a:extLst>
               </a:tr>
-              <a:tr h="620159">
+              <a:tr h="734239">
                 <a:tc>
                   <a:txBody>
                     <a:bodyPr/>
@@ -30065,7 +30799,7 @@
                   </a:ext>
                 </a:extLst>
               </a:tr>
-              <a:tr h="759348">
+              <a:tr h="974346">
                 <a:tc>
                   <a:txBody>
                     <a:bodyPr/>
@@ -30206,232 +30940,6 @@
                     <a:p>
                       <a:pPr algn="ctr"/>
                       <a:r>
-                        <a:rPr lang="en-CN" sz="2400">
-                          <a:solidFill>
-                            <a:schemeClr val="bg2"/>
-                          </a:solidFill>
-                          <a:effectLst/>
-                        </a:rPr>
-                        <a:t>✅ </a:t>
-                      </a:r>
-                      <a:r>
-                        <a:rPr lang="zh-CN" altLang="en-US" sz="2400">
-                          <a:solidFill>
-                            <a:schemeClr val="bg2"/>
-                          </a:solidFill>
-                          <a:effectLst/>
-                        </a:rPr>
-                        <a:t>易对比多时相（如</a:t>
-                      </a:r>
-                      <a:r>
-                        <a:rPr lang="en-US" sz="2400">
-                          <a:solidFill>
-                            <a:schemeClr val="bg2"/>
-                          </a:solidFill>
-                          <a:effectLst/>
-                        </a:rPr>
-                        <a:t>NDVI</a:t>
-                      </a:r>
-                      <a:r>
-                        <a:rPr lang="zh-CN" altLang="en-US" sz="2400">
-                          <a:solidFill>
-                            <a:schemeClr val="bg2"/>
-                          </a:solidFill>
-                          <a:effectLst/>
-                        </a:rPr>
-                        <a:t>变化）</a:t>
-                      </a:r>
-                    </a:p>
-                  </a:txBody>
-                  <a:tcPr anchor="ctr">
-                    <a:lnL w="9525" cap="flat" cmpd="sng" algn="ctr">
-                      <a:solidFill>
-                        <a:srgbClr val="DDDDDD"/>
-                      </a:solidFill>
-                      <a:prstDash val="solid"/>
-                      <a:round/>
-                      <a:headEnd type="none" w="med" len="med"/>
-                      <a:tailEnd type="none" w="med" len="med"/>
-                    </a:lnL>
-                    <a:lnR w="9525" cap="flat" cmpd="sng" algn="ctr">
-                      <a:solidFill>
-                        <a:srgbClr val="DDDDDD"/>
-                      </a:solidFill>
-                      <a:prstDash val="solid"/>
-                      <a:round/>
-                      <a:headEnd type="none" w="med" len="med"/>
-                      <a:tailEnd type="none" w="med" len="med"/>
-                    </a:lnR>
-                    <a:lnT w="9525" cap="flat" cmpd="sng" algn="ctr">
-                      <a:solidFill>
-                        <a:srgbClr val="DDDDDD"/>
-                      </a:solidFill>
-                      <a:prstDash val="solid"/>
-                      <a:round/>
-                      <a:headEnd type="none" w="med" len="med"/>
-                      <a:tailEnd type="none" w="med" len="med"/>
-                    </a:lnT>
-                    <a:lnB w="9525" cap="flat" cmpd="sng" algn="ctr">
-                      <a:solidFill>
-                        <a:srgbClr val="DDDDDD"/>
-                      </a:solidFill>
-                      <a:prstDash val="solid"/>
-                      <a:round/>
-                      <a:headEnd type="none" w="med" len="med"/>
-                      <a:tailEnd type="none" w="med" len="med"/>
-                    </a:lnB>
-                    <a:solidFill>
-                      <a:srgbClr val="F8F8F8"/>
-                    </a:solidFill>
-                  </a:tcPr>
-                </a:tc>
-                <a:extLst>
-                  <a:ext uri="{0D108BD9-81ED-4DB2-BD59-A6C34878D82A}">
-                    <a16:rowId xmlns:a16="http://schemas.microsoft.com/office/drawing/2014/main" val="1027595567"/>
-                  </a:ext>
-                </a:extLst>
-              </a:tr>
-              <a:tr h="759348">
-                <a:tc>
-                  <a:txBody>
-                    <a:bodyPr/>
-                    <a:lstStyle/>
-                    <a:p>
-                      <a:pPr algn="ctr"/>
-                      <a:r>
-                        <a:rPr lang="zh-CN" altLang="en-US" sz="2400" b="1" dirty="0">
-                          <a:solidFill>
-                            <a:schemeClr val="bg2"/>
-                          </a:solidFill>
-                          <a:effectLst/>
-                        </a:rPr>
-                        <a:t>大规模空间覆盖</a:t>
-                      </a:r>
-                      <a:endParaRPr lang="zh-CN" altLang="en-US" sz="2400" dirty="0">
-                        <a:solidFill>
-                          <a:schemeClr val="bg2"/>
-                        </a:solidFill>
-                        <a:effectLst/>
-                      </a:endParaRPr>
-                    </a:p>
-                  </a:txBody>
-                  <a:tcPr anchor="ctr">
-                    <a:lnL w="9525" cap="flat" cmpd="sng" algn="ctr">
-                      <a:solidFill>
-                        <a:srgbClr val="DDDDDD"/>
-                      </a:solidFill>
-                      <a:prstDash val="solid"/>
-                      <a:round/>
-                      <a:headEnd type="none" w="med" len="med"/>
-                      <a:tailEnd type="none" w="med" len="med"/>
-                    </a:lnL>
-                    <a:lnR w="9525" cap="flat" cmpd="sng" algn="ctr">
-                      <a:solidFill>
-                        <a:srgbClr val="DDDDDD"/>
-                      </a:solidFill>
-                      <a:prstDash val="solid"/>
-                      <a:round/>
-                      <a:headEnd type="none" w="med" len="med"/>
-                      <a:tailEnd type="none" w="med" len="med"/>
-                    </a:lnR>
-                    <a:lnT w="9525" cap="flat" cmpd="sng" algn="ctr">
-                      <a:solidFill>
-                        <a:srgbClr val="DDDDDD"/>
-                      </a:solidFill>
-                      <a:prstDash val="solid"/>
-                      <a:round/>
-                      <a:headEnd type="none" w="med" len="med"/>
-                      <a:tailEnd type="none" w="med" len="med"/>
-                    </a:lnT>
-                    <a:lnB w="9525" cap="flat" cmpd="sng" algn="ctr">
-                      <a:solidFill>
-                        <a:srgbClr val="DDDDDD"/>
-                      </a:solidFill>
-                      <a:prstDash val="solid"/>
-                      <a:round/>
-                      <a:headEnd type="none" w="med" len="med"/>
-                      <a:tailEnd type="none" w="med" len="med"/>
-                    </a:lnB>
-                    <a:solidFill>
-                      <a:srgbClr val="F2F2F2"/>
-                    </a:solidFill>
-                  </a:tcPr>
-                </a:tc>
-                <a:tc>
-                  <a:txBody>
-                    <a:bodyPr/>
-                    <a:lstStyle/>
-                    <a:p>
-                      <a:pPr algn="ctr"/>
-                      <a:r>
-                        <a:rPr lang="en-CN" sz="2400">
-                          <a:solidFill>
-                            <a:schemeClr val="bg2"/>
-                          </a:solidFill>
-                          <a:effectLst/>
-                        </a:rPr>
-                        <a:t>❌ </a:t>
-                      </a:r>
-                      <a:r>
-                        <a:rPr lang="zh-CN" altLang="en-US" sz="2400">
-                          <a:solidFill>
-                            <a:schemeClr val="bg2"/>
-                          </a:solidFill>
-                          <a:effectLst/>
-                        </a:rPr>
-                        <a:t>文件体积大（复杂几何）</a:t>
-                      </a:r>
-                    </a:p>
-                  </a:txBody>
-                  <a:tcPr anchor="ctr">
-                    <a:lnL w="9525" cap="flat" cmpd="sng" algn="ctr">
-                      <a:solidFill>
-                        <a:srgbClr val="DDDDDD"/>
-                      </a:solidFill>
-                      <a:prstDash val="solid"/>
-                      <a:round/>
-                      <a:headEnd type="none" w="med" len="med"/>
-                      <a:tailEnd type="none" w="med" len="med"/>
-                    </a:lnL>
-                    <a:lnR w="9525" cap="flat" cmpd="sng" algn="ctr">
-                      <a:solidFill>
-                        <a:srgbClr val="DDDDDD"/>
-                      </a:solidFill>
-                      <a:prstDash val="solid"/>
-                      <a:round/>
-                      <a:headEnd type="none" w="med" len="med"/>
-                      <a:tailEnd type="none" w="med" len="med"/>
-                    </a:lnR>
-                    <a:lnT w="9525" cap="flat" cmpd="sng" algn="ctr">
-                      <a:solidFill>
-                        <a:srgbClr val="DDDDDD"/>
-                      </a:solidFill>
-                      <a:prstDash val="solid"/>
-                      <a:round/>
-                      <a:headEnd type="none" w="med" len="med"/>
-                      <a:tailEnd type="none" w="med" len="med"/>
-                    </a:lnT>
-                    <a:lnB w="9525" cap="flat" cmpd="sng" algn="ctr">
-                      <a:solidFill>
-                        <a:srgbClr val="DDDDDD"/>
-                      </a:solidFill>
-                      <a:prstDash val="solid"/>
-                      <a:round/>
-                      <a:headEnd type="none" w="med" len="med"/>
-                      <a:tailEnd type="none" w="med" len="med"/>
-                    </a:lnB>
-                    <a:solidFill>
-                      <a:srgbClr val="F2F2F2"/>
-                    </a:solidFill>
-                  </a:tcPr>
-                </a:tc>
-                <a:tc>
-                  <a:txBody>
-                    <a:bodyPr/>
-                    <a:lstStyle/>
-                    <a:p>
-                      <a:pPr algn="ctr"/>
-                      <a:r>
                         <a:rPr lang="en-CN" sz="2400" dirty="0">
                           <a:solidFill>
                             <a:schemeClr val="bg2"/>
@@ -30447,7 +30955,25 @@
                           </a:solidFill>
                           <a:effectLst/>
                         </a:rPr>
-                        <a:t>结构简单，适合大范围（如全球气象数据）</a:t>
+                        <a:t>易对比多时相（如</a:t>
+                      </a:r>
+                      <a:r>
+                        <a:rPr lang="en-US" sz="2400" dirty="0">
+                          <a:solidFill>
+                            <a:schemeClr val="bg2"/>
+                          </a:solidFill>
+                          <a:effectLst/>
+                        </a:rPr>
+                        <a:t>NDVI</a:t>
+                      </a:r>
+                      <a:r>
+                        <a:rPr lang="zh-CN" altLang="en-US" sz="2400" dirty="0">
+                          <a:solidFill>
+                            <a:schemeClr val="bg2"/>
+                          </a:solidFill>
+                          <a:effectLst/>
+                        </a:rPr>
+                        <a:t>变化）</a:t>
                       </a:r>
                     </a:p>
                   </a:txBody>
@@ -30489,13 +31015,13 @@
                       <a:tailEnd type="none" w="med" len="med"/>
                     </a:lnB>
                     <a:solidFill>
-                      <a:srgbClr val="F2F2F2"/>
+                      <a:srgbClr val="F8F8F8"/>
                     </a:solidFill>
                   </a:tcPr>
                 </a:tc>
                 <a:extLst>
                   <a:ext uri="{0D108BD9-81ED-4DB2-BD59-A6C34878D82A}">
-                    <a16:rowId xmlns:a16="http://schemas.microsoft.com/office/drawing/2014/main" val="2260655877"/>
+                    <a16:rowId xmlns:a16="http://schemas.microsoft.com/office/drawing/2014/main" val="1027595567"/>
                   </a:ext>
                 </a:extLst>
               </a:tr>
@@ -30519,7 +31045,7 @@
 </p:sld>
 </file>
 
-<file path=ppt/slides/slide25.xml><?xml version="1.0" encoding="utf-8"?>
+<file path=ppt/slides/slide26.xml><?xml version="1.0" encoding="utf-8"?>
 <p:sld xmlns:a="http://schemas.openxmlformats.org/drawingml/2006/main" xmlns:r="http://schemas.openxmlformats.org/officeDocument/2006/relationships" xmlns:p="http://schemas.openxmlformats.org/presentationml/2006/main">
   <p:cSld>
     <p:spTree>
@@ -30638,7 +31164,7 @@
               <a:defRPr/>
             </a:pPr>
             <a:r>
-              <a:rPr lang="zh-CN" altLang="en-US" sz="2800" dirty="0">
+              <a:rPr lang="zh-CN" altLang="en-US" sz="2800" b="1" dirty="0">
                 <a:solidFill>
                   <a:schemeClr val="accent2"/>
                 </a:solidFill>
@@ -30647,7 +31173,7 @@
               </a:rPr>
               <a:t>思考：哪些适合用矢量数据，哪些适合用栅格数据？</a:t>
             </a:r>
-            <a:endParaRPr lang="en-US" altLang="zh-CN" sz="2800" dirty="0">
+            <a:endParaRPr lang="en-US" altLang="zh-CN" sz="2800" b="1" dirty="0">
               <a:solidFill>
                 <a:schemeClr val="accent2"/>
               </a:solidFill>
@@ -30672,28 +31198,28 @@
           <p:nvPr>
             <p:extLst>
               <p:ext uri="{D42A27DB-BD31-4B8C-83A1-F6EECF244321}">
-                <p14:modId xmlns:p14="http://schemas.microsoft.com/office/powerpoint/2010/main" val="1532260362"/>
+                <p14:modId xmlns:p14="http://schemas.microsoft.com/office/powerpoint/2010/main" val="136296284"/>
               </p:ext>
             </p:extLst>
           </p:nvPr>
         </p:nvGraphicFramePr>
         <p:xfrm>
-          <a:off x="515257" y="2660752"/>
-          <a:ext cx="10486572" cy="4015821"/>
+          <a:off x="1116918" y="2660754"/>
+          <a:ext cx="9714733" cy="3420927"/>
         </p:xfrm>
         <a:graphic>
           <a:graphicData uri="http://schemas.openxmlformats.org/drawingml/2006/table">
             <a:tbl>
               <a:tblPr/>
               <a:tblGrid>
-                <a:gridCol w="5029199">
+                <a:gridCol w="4659037">
                   <a:extLst>
                     <a:ext uri="{9D8B030D-6E8A-4147-A177-3AD203B41FA5}">
                       <a16:colId xmlns:a16="http://schemas.microsoft.com/office/drawing/2014/main" val="2233476907"/>
                     </a:ext>
                   </a:extLst>
                 </a:gridCol>
-                <a:gridCol w="5457373">
+                <a:gridCol w="5055696">
                   <a:extLst>
                     <a:ext uri="{9D8B030D-6E8A-4147-A177-3AD203B41FA5}">
                       <a16:colId xmlns:a16="http://schemas.microsoft.com/office/drawing/2014/main" val="47640943"/>
@@ -30701,7 +31227,7 @@
                   </a:extLst>
                 </a:gridCol>
               </a:tblGrid>
-              <a:tr h="1338607">
+              <a:tr h="1140309">
                 <a:tc>
                   <a:txBody>
                     <a:bodyPr/>
@@ -30860,7 +31386,7 @@
                   </a:ext>
                 </a:extLst>
               </a:tr>
-              <a:tr h="1338607">
+              <a:tr h="1140309">
                 <a:tc>
                   <a:txBody>
                     <a:bodyPr/>
@@ -31000,7 +31526,7 @@
                   </a:ext>
                 </a:extLst>
               </a:tr>
-              <a:tr h="1338607">
+              <a:tr h="1140309">
                 <a:tc>
                   <a:txBody>
                     <a:bodyPr/>
@@ -31161,7 +31687,7 @@
 </p:sld>
 </file>
 
-<file path=ppt/slides/slide26.xml><?xml version="1.0" encoding="utf-8"?>
+<file path=ppt/slides/slide27.xml><?xml version="1.0" encoding="utf-8"?>
 <p:sld xmlns:a="http://schemas.openxmlformats.org/drawingml/2006/main" xmlns:r="http://schemas.openxmlformats.org/officeDocument/2006/relationships" xmlns:p="http://schemas.openxmlformats.org/presentationml/2006/main">
   <p:cSld>
     <p:spTree>
@@ -31421,10 +31947,159 @@
       </p:sp>
       <p:sp>
         <p:nvSpPr>
+          <p:cNvPr id="4" name="TextBox 3">
+            <a:extLst>
+              <a:ext uri="{FF2B5EF4-FFF2-40B4-BE49-F238E27FC236}">
+                <a16:creationId xmlns:a16="http://schemas.microsoft.com/office/drawing/2014/main" id="{DFE91C0B-C9F8-3FEC-3419-2DE0C6E6DCB8}"/>
+              </a:ext>
+            </a:extLst>
+          </p:cNvPr>
+          <p:cNvSpPr txBox="1"/>
+          <p:nvPr/>
+        </p:nvSpPr>
+        <p:spPr>
+          <a:xfrm>
+            <a:off x="2024157" y="2309949"/>
+            <a:ext cx="8143684" cy="2004010"/>
+          </a:xfrm>
+          <a:prstGeom prst="rect">
+            <a:avLst/>
+          </a:prstGeom>
+          <a:noFill/>
+        </p:spPr>
+        <p:txBody>
+          <a:bodyPr wrap="square" rtlCol="0">
+            <a:spAutoFit/>
+          </a:bodyPr>
+          <a:lstStyle/>
+          <a:p>
+            <a:pPr>
+              <a:lnSpc>
+                <a:spcPct val="150000"/>
+              </a:lnSpc>
+              <a:defRPr/>
+            </a:pPr>
+            <a:r>
+              <a:rPr lang="zh-CN" altLang="en-US" sz="4400" b="1" dirty="0">
+                <a:solidFill>
+                  <a:srgbClr val="FF0000"/>
+                </a:solidFill>
+                <a:latin typeface="微软雅黑"/>
+                <a:ea typeface="微软雅黑"/>
+              </a:rPr>
+              <a:t>提问：</a:t>
+            </a:r>
+            <a:r>
+              <a:rPr lang="zh-CN" altLang="en-CN" sz="4400" b="1" dirty="0">
+                <a:solidFill>
+                  <a:srgbClr val="FF0000"/>
+                </a:solidFill>
+                <a:latin typeface="微软雅黑"/>
+                <a:ea typeface="微软雅黑"/>
+              </a:rPr>
+              <a:t>空间</a:t>
+            </a:r>
+            <a:r>
+              <a:rPr lang="zh-CN" altLang="en-US" sz="4400" b="1" dirty="0">
+                <a:solidFill>
+                  <a:srgbClr val="FF0000"/>
+                </a:solidFill>
+                <a:latin typeface="微软雅黑"/>
+                <a:ea typeface="微软雅黑"/>
+              </a:rPr>
+              <a:t>数据处理具体包含哪些处理？</a:t>
+            </a:r>
+            <a:endParaRPr lang="en-US" altLang="zh-CN" sz="4400" b="1" dirty="0">
+              <a:solidFill>
+                <a:srgbClr val="FF0000"/>
+              </a:solidFill>
+              <a:latin typeface="微软雅黑"/>
+              <a:ea typeface="微软雅黑"/>
+            </a:endParaRPr>
+          </a:p>
+        </p:txBody>
+      </p:sp>
+    </p:spTree>
+    <p:extLst>
+      <p:ext uri="{BB962C8B-B14F-4D97-AF65-F5344CB8AC3E}">
+        <p14:creationId xmlns:p14="http://schemas.microsoft.com/office/powerpoint/2010/main" val="623131075"/>
+      </p:ext>
+    </p:extLst>
+  </p:cSld>
+  <p:clrMapOvr>
+    <a:masterClrMapping/>
+  </p:clrMapOvr>
+  <p:transition>
+    <p:fade/>
+  </p:transition>
+</p:sld>
+</file>
+
+<file path=ppt/slides/slide4.xml><?xml version="1.0" encoding="utf-8"?>
+<p:sld xmlns:a="http://schemas.openxmlformats.org/drawingml/2006/main" xmlns:r="http://schemas.openxmlformats.org/officeDocument/2006/relationships" xmlns:p="http://schemas.openxmlformats.org/presentationml/2006/main">
+  <p:cSld>
+    <p:spTree>
+      <p:nvGrpSpPr>
+        <p:cNvPr id="1" name="">
+          <a:extLst>
+            <a:ext uri="{FF2B5EF4-FFF2-40B4-BE49-F238E27FC236}">
+              <a16:creationId xmlns:a16="http://schemas.microsoft.com/office/drawing/2014/main" id="{C8D841EC-B11C-B5D4-331C-A3AC45728D47}"/>
+            </a:ext>
+          </a:extLst>
+        </p:cNvPr>
+        <p:cNvGrpSpPr/>
+        <p:nvPr/>
+      </p:nvGrpSpPr>
+      <p:grpSpPr>
+        <a:xfrm>
+          <a:off x="0" y="0"/>
+          <a:ext cx="0" cy="0"/>
+          <a:chOff x="0" y="0"/>
+          <a:chExt cx="0" cy="0"/>
+        </a:xfrm>
+      </p:grpSpPr>
+      <p:sp>
+        <p:nvSpPr>
+          <p:cNvPr id="3" name="标题 2">
+            <a:extLst>
+              <a:ext uri="{FF2B5EF4-FFF2-40B4-BE49-F238E27FC236}">
+                <a16:creationId xmlns:a16="http://schemas.microsoft.com/office/drawing/2014/main" id="{2AC5EBA7-454D-B860-7363-C12C7A426700}"/>
+              </a:ext>
+            </a:extLst>
+          </p:cNvPr>
+          <p:cNvSpPr>
+            <a:spLocks noGrp="1"/>
+          </p:cNvSpPr>
+          <p:nvPr>
+            <p:ph type="title"/>
+          </p:nvPr>
+        </p:nvSpPr>
+        <p:spPr>
+          <a:xfrm>
+            <a:off x="0" y="8526"/>
+            <a:ext cx="12191999" cy="792162"/>
+          </a:xfrm>
+        </p:spPr>
+        <p:txBody>
+          <a:bodyPr/>
+          <a:lstStyle/>
+          <a:p>
+            <a:r>
+              <a:rPr lang="zh-CN" altLang="en-US" dirty="0">
+                <a:latin typeface="+mn-ea"/>
+              </a:rPr>
+              <a:t>一、课程简介</a:t>
+            </a:r>
+            <a:endParaRPr lang="zh-CN" altLang="en-US" dirty="0"/>
+          </a:p>
+        </p:txBody>
+      </p:sp>
+      <p:sp>
+        <p:nvSpPr>
           <p:cNvPr id="17" name="TextBox 16">
             <a:extLst>
               <a:ext uri="{FF2B5EF4-FFF2-40B4-BE49-F238E27FC236}">
-                <a16:creationId xmlns:a16="http://schemas.microsoft.com/office/drawing/2014/main" id="{9E05FFCA-3371-AF5C-381D-71D984055F5A}"/>
+                <a16:creationId xmlns:a16="http://schemas.microsoft.com/office/drawing/2014/main" id="{C87BA8A0-CE3B-3A85-A971-B2C40182D8ED}"/>
               </a:ext>
             </a:extLst>
           </p:cNvPr>
@@ -31577,7 +32252,7 @@
           <p:cNvPr id="4" name="TextBox 3">
             <a:extLst>
               <a:ext uri="{FF2B5EF4-FFF2-40B4-BE49-F238E27FC236}">
-                <a16:creationId xmlns:a16="http://schemas.microsoft.com/office/drawing/2014/main" id="{DFE91C0B-C9F8-3FEC-3419-2DE0C6E6DCB8}"/>
+                <a16:creationId xmlns:a16="http://schemas.microsoft.com/office/drawing/2014/main" id="{300BD6C9-6AC4-E464-5B52-AD64FE330A78}"/>
               </a:ext>
             </a:extLst>
           </p:cNvPr>
@@ -31659,7 +32334,7 @@
     </p:spTree>
     <p:extLst>
       <p:ext uri="{BB962C8B-B14F-4D97-AF65-F5344CB8AC3E}">
-        <p14:creationId xmlns:p14="http://schemas.microsoft.com/office/powerpoint/2010/main" val="623131075"/>
+        <p14:creationId xmlns:p14="http://schemas.microsoft.com/office/powerpoint/2010/main" val="2342022486"/>
       </p:ext>
     </p:extLst>
   </p:cSld>
@@ -31672,7 +32347,7 @@
 </p:sld>
 </file>
 
-<file path=ppt/slides/slide4.xml><?xml version="1.0" encoding="utf-8"?>
+<file path=ppt/slides/slide5.xml><?xml version="1.0" encoding="utf-8"?>
 <p:sld xmlns:a="http://schemas.openxmlformats.org/drawingml/2006/main" xmlns:r="http://schemas.openxmlformats.org/officeDocument/2006/relationships" xmlns:p="http://schemas.openxmlformats.org/presentationml/2006/main">
   <p:cSld>
     <p:spTree>
@@ -32420,7 +33095,7 @@
 </p:sld>
 </file>
 
-<file path=ppt/slides/slide5.xml><?xml version="1.0" encoding="utf-8"?>
+<file path=ppt/slides/slide6.xml><?xml version="1.0" encoding="utf-8"?>
 <p:sld xmlns:a="http://schemas.openxmlformats.org/drawingml/2006/main" xmlns:r="http://schemas.openxmlformats.org/officeDocument/2006/relationships" xmlns:p="http://schemas.openxmlformats.org/presentationml/2006/main">
   <p:cSld>
     <p:spTree>
@@ -32722,7 +33397,7 @@
 </p:sld>
 </file>
 
-<file path=ppt/slides/slide6.xml><?xml version="1.0" encoding="utf-8"?>
+<file path=ppt/slides/slide7.xml><?xml version="1.0" encoding="utf-8"?>
 <p:sld xmlns:a="http://schemas.openxmlformats.org/drawingml/2006/main" xmlns:r="http://schemas.openxmlformats.org/officeDocument/2006/relationships" xmlns:p="http://schemas.openxmlformats.org/presentationml/2006/main">
   <p:cSld>
     <p:spTree>
@@ -33997,7 +34672,7 @@
 </p:sld>
 </file>
 
-<file path=ppt/slides/slide7.xml><?xml version="1.0" encoding="utf-8"?>
+<file path=ppt/slides/slide8.xml><?xml version="1.0" encoding="utf-8"?>
 <p:sld xmlns:a="http://schemas.openxmlformats.org/drawingml/2006/main" xmlns:r="http://schemas.openxmlformats.org/officeDocument/2006/relationships" xmlns:p="http://schemas.openxmlformats.org/presentationml/2006/main">
   <p:cSld>
     <p:spTree>
@@ -34288,7 +34963,7 @@
 </p:sld>
 </file>
 
-<file path=ppt/slides/slide8.xml><?xml version="1.0" encoding="utf-8"?>
+<file path=ppt/slides/slide9.xml><?xml version="1.0" encoding="utf-8"?>
 <p:sld xmlns:a="http://schemas.openxmlformats.org/drawingml/2006/main" xmlns:r="http://schemas.openxmlformats.org/officeDocument/2006/relationships" xmlns:p="http://schemas.openxmlformats.org/presentationml/2006/main">
   <p:cSld>
     <p:spTree>
@@ -34489,7 +35164,7 @@
           <p:nvPr>
             <p:extLst>
               <p:ext uri="{D42A27DB-BD31-4B8C-83A1-F6EECF244321}">
-                <p14:modId xmlns:p14="http://schemas.microsoft.com/office/powerpoint/2010/main" val="2225692100"/>
+                <p14:modId xmlns:p14="http://schemas.microsoft.com/office/powerpoint/2010/main" val="3745025365"/>
               </p:ext>
             </p:extLst>
           </p:nvPr>
@@ -34718,7 +35393,7 @@
                           <a:ea typeface="+mn-ea"/>
                           <a:cs typeface="+mn-cs"/>
                         </a:rPr>
-                        <a:t>缺席需请假，除生病无法出勤外，尽量不请假。</a:t>
+                        <a:t>缺席需请假，除生病请假外，尽量不请假。</a:t>
                       </a:r>
                       <a:endParaRPr lang="en-CN" sz="2400" kern="100" dirty="0">
                         <a:solidFill>
@@ -35473,639 +36148,6 @@
     <p:extLst>
       <p:ext uri="{BB962C8B-B14F-4D97-AF65-F5344CB8AC3E}">
         <p14:creationId xmlns:p14="http://schemas.microsoft.com/office/powerpoint/2010/main" val="3516060689"/>
-      </p:ext>
-    </p:extLst>
-  </p:cSld>
-  <p:clrMapOvr>
-    <a:masterClrMapping/>
-  </p:clrMapOvr>
-  <p:transition>
-    <p:fade/>
-  </p:transition>
-</p:sld>
-</file>
-
-<file path=ppt/slides/slide9.xml><?xml version="1.0" encoding="utf-8"?>
-<p:sld xmlns:a="http://schemas.openxmlformats.org/drawingml/2006/main" xmlns:r="http://schemas.openxmlformats.org/officeDocument/2006/relationships" xmlns:p="http://schemas.openxmlformats.org/presentationml/2006/main" showMasterSp="0">
-  <p:cSld>
-    <p:bg>
-      <p:bgPr>
-        <a:solidFill>
-          <a:schemeClr val="tx1">
-            <a:lumMod val="95000"/>
-          </a:schemeClr>
-        </a:solidFill>
-        <a:effectLst/>
-      </p:bgPr>
-    </p:bg>
-    <p:spTree>
-      <p:nvGrpSpPr>
-        <p:cNvPr id="1" name=""/>
-        <p:cNvGrpSpPr/>
-        <p:nvPr/>
-      </p:nvGrpSpPr>
-      <p:grpSpPr>
-        <a:xfrm>
-          <a:off x="0" y="0"/>
-          <a:ext cx="0" cy="0"/>
-          <a:chOff x="0" y="0"/>
-          <a:chExt cx="0" cy="0"/>
-        </a:xfrm>
-      </p:grpSpPr>
-      <p:sp>
-        <p:nvSpPr>
-          <p:cNvPr id="24" name="Rectangle 7"/>
-          <p:cNvSpPr>
-            <a:spLocks noChangeArrowheads="1"/>
-          </p:cNvSpPr>
-          <p:nvPr/>
-        </p:nvSpPr>
-        <p:spPr bwMode="auto">
-          <a:xfrm>
-            <a:off x="1843693" y="1685332"/>
-            <a:ext cx="8501204" cy="1917543"/>
-          </a:xfrm>
-          <a:prstGeom prst="rect">
-            <a:avLst/>
-          </a:prstGeom>
-          <a:noFill/>
-          <a:ln>
-            <a:noFill/>
-          </a:ln>
-          <a:extLst>
-            <a:ext uri="{909E8E84-426E-40DD-AFC4-6F175D3DCCD1}">
-              <a14:hiddenFill xmlns:a14="http://schemas.microsoft.com/office/drawing/2010/main">
-                <a:solidFill>
-                  <a:srgbClr val="FFFFFF"/>
-                </a:solidFill>
-              </a14:hiddenFill>
-            </a:ext>
-            <a:ext uri="{91240B29-F687-4F45-9708-019B960494DF}">
-              <a14:hiddenLine xmlns:a14="http://schemas.microsoft.com/office/drawing/2010/main" w="9525">
-                <a:solidFill>
-                  <a:srgbClr val="000000"/>
-                </a:solidFill>
-                <a:miter lim="800000"/>
-                <a:headEnd/>
-                <a:tailEnd/>
-              </a14:hiddenLine>
-            </a:ext>
-          </a:extLst>
-        </p:spPr>
-        <p:txBody>
-          <a:bodyPr anchor="ctr"/>
-          <a:lstStyle/>
-          <a:p>
-            <a:pPr>
-              <a:defRPr/>
-            </a:pPr>
-            <a:r>
-              <a:rPr lang="zh-CN" altLang="en-US" sz="4800" b="1" dirty="0">
-                <a:solidFill>
-                  <a:srgbClr val="FF0000"/>
-                </a:solidFill>
-                <a:latin typeface="微软雅黑"/>
-                <a:ea typeface="微软雅黑"/>
-              </a:rPr>
-              <a:t>空间数据基本概念</a:t>
-            </a:r>
-            <a:endParaRPr lang="zh-CN" altLang="zh-CN" sz="4800" b="1" dirty="0">
-              <a:solidFill>
-                <a:srgbClr val="FF0000"/>
-              </a:solidFill>
-              <a:latin typeface="微软雅黑"/>
-              <a:ea typeface="微软雅黑"/>
-            </a:endParaRPr>
-          </a:p>
-        </p:txBody>
-      </p:sp>
-      <p:sp>
-        <p:nvSpPr>
-          <p:cNvPr id="25" name="Rectangle 8"/>
-          <p:cNvSpPr>
-            <a:spLocks noChangeArrowheads="1"/>
-          </p:cNvSpPr>
-          <p:nvPr/>
-        </p:nvSpPr>
-        <p:spPr bwMode="auto">
-          <a:xfrm>
-            <a:off x="1677909" y="3931738"/>
-            <a:ext cx="8809022" cy="1439862"/>
-          </a:xfrm>
-          <a:prstGeom prst="rect">
-            <a:avLst/>
-          </a:prstGeom>
-          <a:noFill/>
-          <a:ln>
-            <a:noFill/>
-          </a:ln>
-          <a:extLst>
-            <a:ext uri="{909E8E84-426E-40DD-AFC4-6F175D3DCCD1}">
-              <a14:hiddenFill xmlns:a14="http://schemas.microsoft.com/office/drawing/2010/main">
-                <a:solidFill>
-                  <a:srgbClr val="FFFFFF"/>
-                </a:solidFill>
-              </a14:hiddenFill>
-            </a:ext>
-            <a:ext uri="{91240B29-F687-4F45-9708-019B960494DF}">
-              <a14:hiddenLine xmlns:a14="http://schemas.microsoft.com/office/drawing/2010/main" w="9525">
-                <a:solidFill>
-                  <a:srgbClr val="000000"/>
-                </a:solidFill>
-                <a:miter lim="800000"/>
-                <a:headEnd/>
-                <a:tailEnd/>
-              </a14:hiddenLine>
-            </a:ext>
-          </a:extLst>
-        </p:spPr>
-        <p:txBody>
-          <a:bodyPr/>
-          <a:lstStyle/>
-          <a:p>
-            <a:pPr>
-              <a:lnSpc>
-                <a:spcPct val="150000"/>
-              </a:lnSpc>
-              <a:spcBef>
-                <a:spcPts val="0"/>
-              </a:spcBef>
-              <a:buSzPct val="80000"/>
-              <a:defRPr/>
-            </a:pPr>
-            <a:r>
-              <a:rPr lang="zh-CN" altLang="en-US" b="1">
-                <a:solidFill>
-                  <a:srgbClr val="002060"/>
-                </a:solidFill>
-                <a:latin typeface="微软雅黑"/>
-                <a:ea typeface="微软雅黑"/>
-                <a:cs typeface="微软雅黑" charset="0"/>
-              </a:rPr>
-              <a:t>罗 新</a:t>
-            </a:r>
-            <a:endParaRPr lang="en-US" altLang="zh-CN" b="1">
-              <a:solidFill>
-                <a:srgbClr val="002060"/>
-              </a:solidFill>
-              <a:latin typeface="微软雅黑"/>
-              <a:ea typeface="微软雅黑"/>
-              <a:cs typeface="微软雅黑" charset="0"/>
-            </a:endParaRPr>
-          </a:p>
-          <a:p>
-            <a:pPr>
-              <a:lnSpc>
-                <a:spcPct val="150000"/>
-              </a:lnSpc>
-              <a:spcBef>
-                <a:spcPts val="0"/>
-              </a:spcBef>
-              <a:buSzPct val="80000"/>
-              <a:defRPr/>
-            </a:pPr>
-            <a:r>
-              <a:rPr lang="zh-CN" altLang="en-US" b="1">
-                <a:solidFill>
-                  <a:srgbClr val="002060"/>
-                </a:solidFill>
-                <a:latin typeface="微软雅黑"/>
-                <a:ea typeface="微软雅黑"/>
-                <a:cs typeface="微软雅黑" charset="0"/>
-              </a:rPr>
-              <a:t>云南大学 地球科学学院</a:t>
-            </a:r>
-            <a:endParaRPr lang="en-US" altLang="zh-CN" b="1">
-              <a:solidFill>
-                <a:srgbClr val="002060"/>
-              </a:solidFill>
-              <a:latin typeface="微软雅黑"/>
-              <a:ea typeface="微软雅黑"/>
-              <a:cs typeface="微软雅黑" charset="0"/>
-            </a:endParaRPr>
-          </a:p>
-          <a:p>
-            <a:pPr>
-              <a:lnSpc>
-                <a:spcPct val="150000"/>
-              </a:lnSpc>
-              <a:spcBef>
-                <a:spcPts val="0"/>
-              </a:spcBef>
-              <a:buSzPct val="80000"/>
-              <a:defRPr/>
-            </a:pPr>
-            <a:endParaRPr lang="zh-CN" altLang="en-US" sz="2800" b="1">
-              <a:solidFill>
-                <a:srgbClr val="002060"/>
-              </a:solidFill>
-              <a:latin typeface="微软雅黑"/>
-              <a:ea typeface="微软雅黑"/>
-              <a:cs typeface="微软雅黑" charset="0"/>
-            </a:endParaRPr>
-          </a:p>
-          <a:p>
-            <a:pPr>
-              <a:lnSpc>
-                <a:spcPct val="120000"/>
-              </a:lnSpc>
-              <a:spcBef>
-                <a:spcPts val="0"/>
-              </a:spcBef>
-              <a:spcAft>
-                <a:spcPts val="0"/>
-              </a:spcAft>
-              <a:buSzPct val="80000"/>
-              <a:defRPr/>
-            </a:pPr>
-            <a:endParaRPr lang="en-US" altLang="zh-CN" sz="2000">
-              <a:solidFill>
-                <a:srgbClr val="002060"/>
-              </a:solidFill>
-              <a:latin typeface="微软雅黑"/>
-              <a:ea typeface="微软雅黑"/>
-              <a:cs typeface="微软雅黑" charset="0"/>
-            </a:endParaRPr>
-          </a:p>
-          <a:p>
-            <a:pPr>
-              <a:lnSpc>
-                <a:spcPct val="120000"/>
-              </a:lnSpc>
-              <a:spcBef>
-                <a:spcPts val="0"/>
-              </a:spcBef>
-              <a:spcAft>
-                <a:spcPts val="0"/>
-              </a:spcAft>
-              <a:buSzPct val="80000"/>
-              <a:defRPr/>
-            </a:pPr>
-            <a:endParaRPr lang="en-US" altLang="zh-CN" sz="2000">
-              <a:solidFill>
-                <a:srgbClr val="002060"/>
-              </a:solidFill>
-              <a:latin typeface="微软雅黑"/>
-              <a:ea typeface="微软雅黑"/>
-              <a:cs typeface="微软雅黑" charset="0"/>
-            </a:endParaRPr>
-          </a:p>
-          <a:p>
-            <a:pPr>
-              <a:lnSpc>
-                <a:spcPct val="120000"/>
-              </a:lnSpc>
-              <a:spcBef>
-                <a:spcPts val="0"/>
-              </a:spcBef>
-              <a:spcAft>
-                <a:spcPts val="0"/>
-              </a:spcAft>
-              <a:buSzPct val="80000"/>
-              <a:defRPr/>
-            </a:pPr>
-            <a:endParaRPr lang="en-US" altLang="zh-CN" sz="1800">
-              <a:solidFill>
-                <a:srgbClr val="002060"/>
-              </a:solidFill>
-              <a:latin typeface="微软雅黑"/>
-              <a:ea typeface="微软雅黑"/>
-              <a:cs typeface="微软雅黑" charset="0"/>
-            </a:endParaRPr>
-          </a:p>
-        </p:txBody>
-      </p:sp>
-      <p:sp>
-        <p:nvSpPr>
-          <p:cNvPr id="54" name="矩形 53"/>
-          <p:cNvSpPr/>
-          <p:nvPr/>
-        </p:nvSpPr>
-        <p:spPr>
-          <a:xfrm flipV="1">
-            <a:off x="2316000" y="3614405"/>
-            <a:ext cx="7560000" cy="45719"/>
-          </a:xfrm>
-          <a:prstGeom prst="rect">
-            <a:avLst/>
-          </a:prstGeom>
-          <a:gradFill flip="none" rotWithShape="1">
-            <a:gsLst>
-              <a:gs pos="0">
-                <a:schemeClr val="accent1">
-                  <a:tint val="66000"/>
-                  <a:satMod val="160000"/>
-                  <a:lumMod val="0"/>
-                  <a:lumOff val="100000"/>
-                  <a:alpha val="0"/>
-                </a:schemeClr>
-              </a:gs>
-              <a:gs pos="50000">
-                <a:schemeClr val="accent1"/>
-              </a:gs>
-              <a:gs pos="100000">
-                <a:schemeClr val="accent1">
-                  <a:tint val="23500"/>
-                  <a:satMod val="160000"/>
-                  <a:lumMod val="0"/>
-                  <a:lumOff val="100000"/>
-                  <a:alpha val="0"/>
-                </a:schemeClr>
-              </a:gs>
-            </a:gsLst>
-            <a:lin ang="10800000" scaled="1"/>
-            <a:tileRect/>
-          </a:gradFill>
-        </p:spPr>
-        <p:txBody>
-          <a:bodyPr wrap="square" lIns="0" rtlCol="0" anchor="ctr">
-            <a:noAutofit/>
-          </a:bodyPr>
-          <a:lstStyle/>
-          <a:p>
-            <a:pPr algn="l">
-              <a:defRPr/>
-            </a:pPr>
-            <a:endParaRPr lang="zh-CN" altLang="en-US" b="1">
-              <a:solidFill>
-                <a:srgbClr val="FF0000"/>
-              </a:solidFill>
-              <a:latin typeface="微软雅黑" pitchFamily="34" charset="-122"/>
-              <a:ea typeface="微软雅黑" pitchFamily="34" charset="-122"/>
-            </a:endParaRPr>
-          </a:p>
-        </p:txBody>
-      </p:sp>
-      <p:sp>
-        <p:nvSpPr>
-          <p:cNvPr id="2" name="Rectangle 1">
-            <a:extLst>
-              <a:ext uri="{FF2B5EF4-FFF2-40B4-BE49-F238E27FC236}">
-                <a16:creationId xmlns:a16="http://schemas.microsoft.com/office/drawing/2014/main" id="{C2515BE6-09AD-694B-8839-0C2DC98FAD34}"/>
-              </a:ext>
-            </a:extLst>
-          </p:cNvPr>
-          <p:cNvSpPr/>
-          <p:nvPr/>
-        </p:nvSpPr>
-        <p:spPr>
-          <a:xfrm>
-            <a:off x="1831819" y="5474698"/>
-            <a:ext cx="8627953" cy="784830"/>
-          </a:xfrm>
-          <a:prstGeom prst="rect">
-            <a:avLst/>
-          </a:prstGeom>
-        </p:spPr>
-        <p:txBody>
-          <a:bodyPr wrap="square">
-            <a:spAutoFit/>
-          </a:bodyPr>
-          <a:lstStyle/>
-          <a:p>
-            <a:pPr>
-              <a:defRPr/>
-            </a:pPr>
-            <a:r>
-              <a:rPr lang="en-US" sz="1800">
-                <a:solidFill>
-                  <a:prstClr val="black"/>
-                </a:solidFill>
-                <a:latin typeface="微软雅黑"/>
-                <a:ea typeface="微软雅黑"/>
-              </a:rPr>
-              <a:t>邮箱</a:t>
-            </a:r>
-            <a:r>
-              <a:rPr lang="en-CN" sz="1800">
-                <a:solidFill>
-                  <a:prstClr val="black"/>
-                </a:solidFill>
-                <a:latin typeface="微软雅黑"/>
-                <a:ea typeface="微软雅黑"/>
-              </a:rPr>
-              <a:t>: xinluo_xin@ynu.edu.cn</a:t>
-            </a:r>
-          </a:p>
-          <a:p>
-            <a:pPr>
-              <a:defRPr/>
-            </a:pPr>
-            <a:r>
-              <a:rPr lang="en-CN" sz="1800">
-                <a:solidFill>
-                  <a:prstClr val="black"/>
-                </a:solidFill>
-                <a:latin typeface="微软雅黑"/>
-                <a:ea typeface="微软雅黑"/>
-              </a:rPr>
-              <a:t>地址</a:t>
-            </a:r>
-            <a:r>
-              <a:rPr lang="zh-CN" altLang="en-US" sz="1800">
-                <a:solidFill>
-                  <a:prstClr val="black"/>
-                </a:solidFill>
-                <a:latin typeface="微软雅黑"/>
-                <a:ea typeface="微软雅黑"/>
-              </a:rPr>
-              <a:t>：地球科学学院</a:t>
-            </a:r>
-            <a:r>
-              <a:rPr lang="en-US" altLang="zh-CN" sz="1800">
-                <a:solidFill>
-                  <a:prstClr val="black"/>
-                </a:solidFill>
-                <a:latin typeface="微软雅黑"/>
-                <a:ea typeface="微软雅黑"/>
-              </a:rPr>
-              <a:t>1327</a:t>
-            </a:r>
-            <a:r>
-              <a:rPr lang="zh-CN" altLang="en-US" sz="1800">
-                <a:solidFill>
-                  <a:prstClr val="black"/>
-                </a:solidFill>
-                <a:latin typeface="微软雅黑"/>
-                <a:ea typeface="微软雅黑"/>
-              </a:rPr>
-              <a:t>办公室</a:t>
-            </a:r>
-            <a:endParaRPr lang="en-CN" sz="1800">
-              <a:solidFill>
-                <a:prstClr val="black"/>
-              </a:solidFill>
-              <a:latin typeface="微软雅黑"/>
-              <a:ea typeface="微软雅黑"/>
-            </a:endParaRPr>
-          </a:p>
-        </p:txBody>
-      </p:sp>
-      <p:pic>
-        <p:nvPicPr>
-          <p:cNvPr id="4" name="Picture 3">
-            <a:extLst>
-              <a:ext uri="{FF2B5EF4-FFF2-40B4-BE49-F238E27FC236}">
-                <a16:creationId xmlns:a16="http://schemas.microsoft.com/office/drawing/2014/main" id="{C5A20417-E7CA-C285-EB98-9BD26873E83E}"/>
-              </a:ext>
-            </a:extLst>
-          </p:cNvPr>
-          <p:cNvPicPr>
-            <a:picLocks noChangeAspect="1"/>
-          </p:cNvPicPr>
-          <p:nvPr/>
-        </p:nvPicPr>
-        <p:blipFill>
-          <a:blip r:embed="rId3"/>
-          <a:stretch>
-            <a:fillRect/>
-          </a:stretch>
-        </p:blipFill>
-        <p:spPr>
-          <a:xfrm>
-            <a:off x="1843694" y="243145"/>
-            <a:ext cx="2866773" cy="1012641"/>
-          </a:xfrm>
-          <a:prstGeom prst="rect">
-            <a:avLst/>
-          </a:prstGeom>
-        </p:spPr>
-      </p:pic>
-      <p:pic>
-        <p:nvPicPr>
-          <p:cNvPr id="9" name="Picture 8">
-            <a:extLst>
-              <a:ext uri="{FF2B5EF4-FFF2-40B4-BE49-F238E27FC236}">
-                <a16:creationId xmlns:a16="http://schemas.microsoft.com/office/drawing/2014/main" id="{D79EB157-7CF0-C636-5797-94C0A73AF8D4}"/>
-              </a:ext>
-            </a:extLst>
-          </p:cNvPr>
-          <p:cNvPicPr>
-            <a:picLocks noChangeAspect="1"/>
-          </p:cNvPicPr>
-          <p:nvPr/>
-        </p:nvPicPr>
-        <p:blipFill>
-          <a:blip r:embed="rId4"/>
-          <a:stretch>
-            <a:fillRect/>
-          </a:stretch>
-        </p:blipFill>
-        <p:spPr>
-          <a:xfrm>
-            <a:off x="7686262" y="6259528"/>
-            <a:ext cx="2996979" cy="622992"/>
-          </a:xfrm>
-          <a:prstGeom prst="rect">
-            <a:avLst/>
-          </a:prstGeom>
-        </p:spPr>
-      </p:pic>
-      <p:sp>
-        <p:nvSpPr>
-          <p:cNvPr id="3" name="TextBox 2">
-            <a:extLst>
-              <a:ext uri="{FF2B5EF4-FFF2-40B4-BE49-F238E27FC236}">
-                <a16:creationId xmlns:a16="http://schemas.microsoft.com/office/drawing/2014/main" id="{E375549C-74EF-2C8F-6432-2C52B803FB1B}"/>
-              </a:ext>
-            </a:extLst>
-          </p:cNvPr>
-          <p:cNvSpPr txBox="1"/>
-          <p:nvPr/>
-        </p:nvSpPr>
-        <p:spPr>
-          <a:xfrm>
-            <a:off x="6492823" y="261082"/>
-            <a:ext cx="4217822" cy="369332"/>
-          </a:xfrm>
-          <a:prstGeom prst="rect">
-            <a:avLst/>
-          </a:prstGeom>
-          <a:noFill/>
-        </p:spPr>
-        <p:txBody>
-          <a:bodyPr wrap="none" rtlCol="0">
-            <a:spAutoFit/>
-          </a:bodyPr>
-          <a:lstStyle/>
-          <a:p>
-            <a:r>
-              <a:rPr lang="en-CN" sz="1800" b="1" dirty="0">
-                <a:solidFill>
-                  <a:schemeClr val="bg2"/>
-                </a:solidFill>
-                <a:latin typeface="+mn-ea"/>
-                <a:ea typeface="+mn-ea"/>
-              </a:rPr>
-              <a:t>云南大学</a:t>
-            </a:r>
-            <a:r>
-              <a:rPr lang="en-US" altLang="zh-CN" sz="1800" b="1" dirty="0">
-                <a:solidFill>
-                  <a:schemeClr val="bg2"/>
-                </a:solidFill>
-                <a:latin typeface="+mn-ea"/>
-                <a:ea typeface="+mn-ea"/>
-              </a:rPr>
-              <a:t>《</a:t>
-            </a:r>
-            <a:r>
-              <a:rPr lang="en-CN" sz="1800" b="1" dirty="0">
-                <a:solidFill>
-                  <a:schemeClr val="bg2"/>
-                </a:solidFill>
-                <a:latin typeface="+mn-ea"/>
-                <a:ea typeface="+mn-ea"/>
-              </a:rPr>
-              <a:t> 空间数据处理 </a:t>
-            </a:r>
-            <a:r>
-              <a:rPr lang="en-US" altLang="zh-CN" sz="1800" b="1" dirty="0">
-                <a:solidFill>
-                  <a:schemeClr val="bg2"/>
-                </a:solidFill>
-                <a:latin typeface="+mn-ea"/>
-                <a:ea typeface="+mn-ea"/>
-              </a:rPr>
-              <a:t>》</a:t>
-            </a:r>
-            <a:r>
-              <a:rPr lang="en-CN" sz="1800" b="1" dirty="0">
-                <a:solidFill>
-                  <a:schemeClr val="bg2"/>
-                </a:solidFill>
-                <a:latin typeface="+mn-ea"/>
-                <a:ea typeface="+mn-ea"/>
-              </a:rPr>
-              <a:t>课程第</a:t>
-            </a:r>
-            <a:r>
-              <a:rPr lang="zh-CN" altLang="en-US" sz="1800" b="1" dirty="0">
-                <a:solidFill>
-                  <a:schemeClr val="bg2"/>
-                </a:solidFill>
-                <a:latin typeface="+mn-ea"/>
-                <a:ea typeface="+mn-ea"/>
-              </a:rPr>
-              <a:t>一</a:t>
-            </a:r>
-            <a:r>
-              <a:rPr lang="en-CN" sz="1800" b="1" dirty="0">
-                <a:solidFill>
-                  <a:schemeClr val="bg2"/>
-                </a:solidFill>
-                <a:latin typeface="+mn-ea"/>
-                <a:ea typeface="+mn-ea"/>
-              </a:rPr>
-              <a:t>章</a:t>
-            </a:r>
-          </a:p>
-        </p:txBody>
-      </p:sp>
-    </p:spTree>
-    <p:extLst>
-      <p:ext uri="{BB962C8B-B14F-4D97-AF65-F5344CB8AC3E}">
-        <p14:creationId xmlns:p14="http://schemas.microsoft.com/office/powerpoint/2010/main" val="1658607177"/>
       </p:ext>
     </p:extLst>
   </p:cSld>

--- a/第1章-空间数据简介/第1节-空间数据基本概念-2学时.pptx
+++ b/第1章-空间数据简介/第1节-空间数据基本概念-2学时.pptx
@@ -1662,6 +1662,30 @@
     </pc:docChg>
   </pc:docChgLst>
   <pc:docChgLst>
+    <pc:chgData name="Xin Luo" userId="82312ee5779919a4" providerId="LiveId" clId="{DA3CAFA3-5513-6141-A5FE-EEEF42866040}"/>
+    <pc:docChg chg="modSld">
+      <pc:chgData name="Xin Luo" userId="82312ee5779919a4" providerId="LiveId" clId="{DA3CAFA3-5513-6141-A5FE-EEEF42866040}" dt="2025-02-25T01:22:35.983" v="43" actId="1035"/>
+      <pc:docMkLst>
+        <pc:docMk/>
+      </pc:docMkLst>
+      <pc:sldChg chg="modSp mod">
+        <pc:chgData name="Xin Luo" userId="82312ee5779919a4" providerId="LiveId" clId="{DA3CAFA3-5513-6141-A5FE-EEEF42866040}" dt="2025-02-25T01:22:35.983" v="43" actId="1035"/>
+        <pc:sldMkLst>
+          <pc:docMk/>
+          <pc:sldMk cId="1602808061" sldId="2707"/>
+        </pc:sldMkLst>
+        <pc:spChg chg="mod">
+          <ac:chgData name="Xin Luo" userId="82312ee5779919a4" providerId="LiveId" clId="{DA3CAFA3-5513-6141-A5FE-EEEF42866040}" dt="2025-02-25T01:22:35.983" v="43" actId="1035"/>
+          <ac:spMkLst>
+            <pc:docMk/>
+            <pc:sldMk cId="1602808061" sldId="2707"/>
+            <ac:spMk id="2" creationId="{631AADB6-C88A-D817-4683-FC087E4E240F}"/>
+          </ac:spMkLst>
+        </pc:spChg>
+      </pc:sldChg>
+    </pc:docChg>
+  </pc:docChgLst>
+  <pc:docChgLst>
     <pc:chgData name="Xin Luo" userId="82312ee5779919a4" providerId="LiveId" clId="{4DB6C473-8E57-A543-81F7-48BE109E8C13}"/>
     <pc:docChg chg="undo custSel addSld delSld modSld sldOrd delMainMaster">
       <pc:chgData name="Xin Luo" userId="82312ee5779919a4" providerId="LiveId" clId="{4DB6C473-8E57-A543-81F7-48BE109E8C13}" dt="2023-02-21T15:10:04.498" v="5724" actId="108"/>
@@ -2007,30 +2031,6 @@
           </pc:sldLayoutMkLst>
         </pc:sldLayoutChg>
       </pc:sldMasterChg>
-    </pc:docChg>
-  </pc:docChgLst>
-  <pc:docChgLst>
-    <pc:chgData name="Xin Luo" userId="82312ee5779919a4" providerId="LiveId" clId="{DA3CAFA3-5513-6141-A5FE-EEEF42866040}"/>
-    <pc:docChg chg="modSld">
-      <pc:chgData name="Xin Luo" userId="82312ee5779919a4" providerId="LiveId" clId="{DA3CAFA3-5513-6141-A5FE-EEEF42866040}" dt="2025-02-25T01:22:35.983" v="43" actId="1035"/>
-      <pc:docMkLst>
-        <pc:docMk/>
-      </pc:docMkLst>
-      <pc:sldChg chg="modSp mod">
-        <pc:chgData name="Xin Luo" userId="82312ee5779919a4" providerId="LiveId" clId="{DA3CAFA3-5513-6141-A5FE-EEEF42866040}" dt="2025-02-25T01:22:35.983" v="43" actId="1035"/>
-        <pc:sldMkLst>
-          <pc:docMk/>
-          <pc:sldMk cId="1602808061" sldId="2707"/>
-        </pc:sldMkLst>
-        <pc:spChg chg="mod">
-          <ac:chgData name="Xin Luo" userId="82312ee5779919a4" providerId="LiveId" clId="{DA3CAFA3-5513-6141-A5FE-EEEF42866040}" dt="2025-02-25T01:22:35.983" v="43" actId="1035"/>
-          <ac:spMkLst>
-            <pc:docMk/>
-            <pc:sldMk cId="1602808061" sldId="2707"/>
-            <ac:spMk id="2" creationId="{631AADB6-C88A-D817-4683-FC087E4E240F}"/>
-          </ac:spMkLst>
-        </pc:spChg>
-      </pc:sldChg>
     </pc:docChg>
   </pc:docChgLst>
   <pc:docChgLst>
@@ -3065,7 +3065,7 @@
               </a14:hiddenFill>
             </a:ext>
             <a:ext uri="{FAA26D3D-D897-4be2-8F04-BA451C77F1D7}">
-              <ma14:placeholderFlag xmlns="" xmlns:ma14="http://schemas.microsoft.com/office/mac/drawingml/2011/main" val="1"/>
+              <ma14:placeholderFlag xmlns:ma14="http://schemas.microsoft.com/office/mac/drawingml/2011/main" xmlns="" val="1"/>
             </a:ext>
           </a:extLst>
         </p:spPr>
@@ -3453,7 +3453,7 @@
               </a14:hiddenLine>
             </a:ext>
             <a:ext uri="{FAA26D3D-D897-4be2-8F04-BA451C77F1D7}">
-              <ma14:placeholderFlag xmlns="" xmlns:ma14="http://schemas.microsoft.com/office/mac/drawingml/2011/main" val="1"/>
+              <ma14:placeholderFlag xmlns:ma14="http://schemas.microsoft.com/office/mac/drawingml/2011/main" xmlns="" val="1"/>
             </a:ext>
           </a:extLst>
         </p:spPr>
@@ -3570,7 +3570,7 @@
               </a14:hiddenLine>
             </a:ext>
             <a:ext uri="{FAA26D3D-D897-4be2-8F04-BA451C77F1D7}">
-              <ma14:placeholderFlag xmlns="" xmlns:ma14="http://schemas.microsoft.com/office/mac/drawingml/2011/main" val="1"/>
+              <ma14:placeholderFlag xmlns:ma14="http://schemas.microsoft.com/office/mac/drawingml/2011/main" xmlns="" val="1"/>
             </a:ext>
           </a:extLst>
         </p:spPr>
@@ -7515,7 +7515,7 @@
               </a14:hiddenLine>
             </a:ext>
             <a:ext uri="{FAA26D3D-D897-4be2-8F04-BA451C77F1D7}">
-              <ma14:placeholderFlag xmlns="" xmlns:ma14="http://schemas.microsoft.com/office/mac/drawingml/2011/main" val="1"/>
+              <ma14:placeholderFlag xmlns:ma14="http://schemas.microsoft.com/office/mac/drawingml/2011/main" xmlns="" val="1"/>
             </a:ext>
           </a:extLst>
         </p:spPr>
@@ -11211,7 +11211,7 @@
               </a14:hiddenLine>
             </a:ext>
             <a:ext uri="{FAA26D3D-D897-4be2-8F04-BA451C77F1D7}">
-              <ma14:placeholderFlag xmlns="" xmlns:ma14="http://schemas.microsoft.com/office/mac/drawingml/2011/main" val="1"/>
+              <ma14:placeholderFlag xmlns:ma14="http://schemas.microsoft.com/office/mac/drawingml/2011/main" xmlns="" val="1"/>
             </a:ext>
           </a:extLst>
         </p:spPr>
@@ -35164,7 +35164,7 @@
           <p:nvPr>
             <p:extLst>
               <p:ext uri="{D42A27DB-BD31-4B8C-83A1-F6EECF244321}">
-                <p14:modId xmlns:p14="http://schemas.microsoft.com/office/powerpoint/2010/main" val="3745025365"/>
+                <p14:modId xmlns:p14="http://schemas.microsoft.com/office/powerpoint/2010/main" val="601040845"/>
               </p:ext>
             </p:extLst>
           </p:nvPr>
@@ -35550,29 +35550,7 @@
                           </a:solidFill>
                           <a:effectLst/>
                         </a:rPr>
-                        <a:t>个人作业</a:t>
-                      </a:r>
-                      <a:endParaRPr lang="en-CN" altLang="zh-CN" sz="2400" kern="100" dirty="0">
-                        <a:solidFill>
-                          <a:schemeClr val="accent3"/>
-                        </a:solidFill>
-                        <a:effectLst/>
-                      </a:endParaRPr>
-                    </a:p>
-                    <a:p>
-                      <a:pPr algn="ctr">
-                        <a:lnSpc>
-                          <a:spcPct val="100000"/>
-                        </a:lnSpc>
-                      </a:pPr>
-                      <a:r>
-                        <a:rPr lang="zh-CN" altLang="zh-CN" sz="2400" kern="100" dirty="0">
-                          <a:solidFill>
-                            <a:schemeClr val="accent3"/>
-                          </a:solidFill>
-                          <a:effectLst/>
-                        </a:rPr>
-                        <a:t>（至少</a:t>
+                        <a:t>个人作业（至少</a:t>
                       </a:r>
                       <a:r>
                         <a:rPr lang="en-US" altLang="zh-CN" sz="2400" kern="100" dirty="0">
